--- a/production/slides/04-u2-ch4-slides.pptx
+++ b/production/slides/04-u2-ch4-slides.pptx
@@ -10,6 +10,7 @@
     <p:sldId id="258" r:id="rId9"/>
     <p:sldId id="259" r:id="rId10"/>
     <p:sldId id="260" r:id="rId11"/>
+    <p:sldId id="274" r:id="rId25"/>
     <p:sldId id="261" r:id="rId12"/>
     <p:sldId id="262" r:id="rId13"/>
     <p:sldId id="263" r:id="rId14"/>
@@ -5661,6 +5662,369 @@
                 <a:latin typeface="Arial"/>
               </a:rPr>
               <a:t>B. We learn heat → steam → turbine → generator, not fission detail.</a:t>
+            </a:r>
+          </a:p>
+        </p:txBody>
+      </p:sp>
+    </p:spTree>
+  </p:cSld>
+  <p:clrMapOvr>
+    <a:masterClrMapping/>
+  </p:clrMapOvr>
+</p:sld>
+</file>
+
+<file path=ppt/slides/slide19.xml><?xml version="1.0" encoding="utf-8"?>
+<p:sld xmlns:a="http://schemas.openxmlformats.org/drawingml/2006/main" xmlns:r="http://schemas.openxmlformats.org/officeDocument/2006/relationships" xmlns:p="http://schemas.openxmlformats.org/presentationml/2006/main">
+  <p:cSld>
+    <p:spTree>
+      <p:nvGrpSpPr>
+        <p:cNvPr id="1" name=""/>
+        <p:cNvGrpSpPr/>
+        <p:nvPr/>
+      </p:nvGrpSpPr>
+      <p:grpSpPr/>
+      <p:sp>
+        <p:nvSpPr>
+          <p:cNvPr id="2" name="Rectangle 1"/>
+          <p:cNvSpPr/>
+          <p:nvPr/>
+        </p:nvSpPr>
+        <p:spPr>
+          <a:xfrm>
+            <a:off x="0" y="0"/>
+            <a:ext cx="12191695" cy="6858000"/>
+          </a:xfrm>
+          <a:prstGeom prst="rect">
+            <a:avLst/>
+          </a:prstGeom>
+          <a:solidFill>
+            <a:srgbClr val="FAFAF8"/>
+          </a:solidFill>
+          <a:ln>
+            <a:noFill/>
+          </a:ln>
+          <a:effectLst/>
+        </p:spPr>
+        <p:style>
+          <a:lnRef idx="1">
+            <a:schemeClr val="accent1"/>
+          </a:lnRef>
+          <a:fillRef idx="3">
+            <a:schemeClr val="accent1"/>
+          </a:fillRef>
+          <a:effectRef idx="2">
+            <a:schemeClr val="accent1"/>
+          </a:effectRef>
+          <a:fontRef idx="minor">
+            <a:schemeClr val="lt1"/>
+          </a:fontRef>
+        </p:style>
+        <p:txBody>
+          <a:bodyPr rtlCol="0" anchor="ctr"/>
+          <a:lstStyle/>
+          <a:p>
+            <a:pPr algn="ctr"/>
+          </a:p>
+        </p:txBody>
+      </p:sp>
+      <p:sp>
+        <p:nvSpPr>
+          <p:cNvPr id="3" name="Rectangle 2"/>
+          <p:cNvSpPr/>
+          <p:nvPr/>
+        </p:nvSpPr>
+        <p:spPr>
+          <a:xfrm>
+            <a:off x="0" y="0"/>
+            <a:ext cx="12191695" cy="1417320"/>
+          </a:xfrm>
+          <a:prstGeom prst="rect">
+            <a:avLst/>
+          </a:prstGeom>
+          <a:solidFill>
+            <a:srgbClr val="2F3C7E"/>
+          </a:solidFill>
+          <a:ln>
+            <a:noFill/>
+          </a:ln>
+          <a:effectLst/>
+        </p:spPr>
+        <p:style>
+          <a:lnRef idx="1">
+            <a:schemeClr val="accent1"/>
+          </a:lnRef>
+          <a:fillRef idx="3">
+            <a:schemeClr val="accent1"/>
+          </a:fillRef>
+          <a:effectRef idx="2">
+            <a:schemeClr val="accent1"/>
+          </a:effectRef>
+          <a:fontRef idx="minor">
+            <a:schemeClr val="lt1"/>
+          </a:fontRef>
+        </p:style>
+        <p:txBody>
+          <a:bodyPr rtlCol="0" anchor="ctr"/>
+          <a:lstStyle/>
+          <a:p>
+            <a:pPr algn="ctr"/>
+          </a:p>
+        </p:txBody>
+      </p:sp>
+      <p:sp>
+        <p:nvSpPr>
+          <p:cNvPr id="4" name="TextBox 3"/>
+          <p:cNvSpPr txBox="1"/>
+          <p:nvPr/>
+        </p:nvSpPr>
+        <p:spPr>
+          <a:xfrm>
+            <a:off x="457200" y="109728"/>
+            <a:ext cx="10424160" cy="868680"/>
+          </a:xfrm>
+          <a:prstGeom prst="rect">
+            <a:avLst/>
+          </a:prstGeom>
+          <a:noFill/>
+        </p:spPr>
+        <p:txBody>
+          <a:bodyPr wrap="square" anchor="ctr">
+            <a:spAutoFit/>
+          </a:bodyPr>
+          <a:lstStyle/>
+          <a:p>
+            <a:pPr algn="l">
+              <a:spcAft>
+                <a:spcPts val="400"/>
+              </a:spcAft>
+            </a:pPr>
+            <a:r>
+              <a:rPr sz="3200" b="1">
+                <a:solidFill>
+                  <a:srgbClr val="FFFFFF"/>
+                </a:solidFill>
+                <a:latin typeface="Arial"/>
+              </a:rPr>
+              <a:t>Coal vs Nuclear — Same Pathway, Different Heat Source</a:t>
+            </a:r>
+          </a:p>
+        </p:txBody>
+      </p:sp>
+      <p:sp>
+        <p:nvSpPr>
+          <p:cNvPr id="5" name="TextBox 4"/>
+          <p:cNvSpPr txBox="1"/>
+          <p:nvPr/>
+        </p:nvSpPr>
+        <p:spPr>
+          <a:xfrm>
+            <a:off x="457200" y="1024128"/>
+            <a:ext cx="10424160" cy="329184"/>
+          </a:xfrm>
+          <a:prstGeom prst="rect">
+            <a:avLst/>
+          </a:prstGeom>
+          <a:noFill/>
+        </p:spPr>
+        <p:txBody>
+          <a:bodyPr wrap="square" anchor="ctr">
+            <a:spAutoFit/>
+          </a:bodyPr>
+          <a:lstStyle/>
+          <a:p>
+            <a:pPr algn="l">
+              <a:spcAft>
+                <a:spcPts val="400"/>
+              </a:spcAft>
+            </a:pPr>
+            <a:r>
+              <a:rPr sz="1500" b="0">
+                <a:solidFill>
+                  <a:srgbClr val="C9D2E8"/>
+                </a:solidFill>
+                <a:latin typeface="Arial"/>
+              </a:rPr>
+              <a:t>Media placeholder · optional video · pending generation</a:t>
+            </a:r>
+          </a:p>
+        </p:txBody>
+      </p:sp>
+      <p:sp>
+        <p:nvSpPr>
+          <p:cNvPr id="6" name="TextBox 5"/>
+          <p:cNvSpPr txBox="1"/>
+          <p:nvPr/>
+        </p:nvSpPr>
+        <p:spPr>
+          <a:xfrm>
+            <a:off x="10607040" y="310896"/>
+            <a:ext cx="731520" cy="365760"/>
+          </a:xfrm>
+          <a:prstGeom prst="rect">
+            <a:avLst/>
+          </a:prstGeom>
+          <a:noFill/>
+        </p:spPr>
+        <p:txBody>
+          <a:bodyPr wrap="square" anchor="ctr">
+            <a:spAutoFit/>
+          </a:bodyPr>
+          <a:lstStyle/>
+          <a:p>
+            <a:pPr algn="r">
+              <a:spcAft>
+                <a:spcPts val="400"/>
+              </a:spcAft>
+            </a:pPr>
+            <a:r>
+              <a:rPr sz="1500" b="0">
+                <a:solidFill>
+                  <a:srgbClr val="C9D2E8"/>
+                </a:solidFill>
+                <a:latin typeface="Arial"/>
+              </a:rPr>
+              <a:t>6</a:t>
+            </a:r>
+          </a:p>
+        </p:txBody>
+      </p:sp>
+      <p:sp>
+        <p:nvSpPr>
+          <p:cNvPr id="7" name="Rounded Rectangle 6"/>
+          <p:cNvSpPr/>
+          <p:nvPr/>
+        </p:nvSpPr>
+        <p:spPr>
+          <a:xfrm>
+            <a:off x="10972800" y="256032"/>
+            <a:ext cx="1051560" cy="420624"/>
+          </a:xfrm>
+          <a:prstGeom prst="roundRect">
+            <a:avLst/>
+          </a:prstGeom>
+          <a:solidFill>
+            <a:srgbClr val="2F3C7E"/>
+          </a:solidFill>
+          <a:ln>
+            <a:noFill/>
+          </a:ln>
+          <a:effectLst/>
+        </p:spPr>
+        <p:style>
+          <a:lnRef idx="1">
+            <a:schemeClr val="accent1"/>
+          </a:lnRef>
+          <a:fillRef idx="3">
+            <a:schemeClr val="accent1"/>
+          </a:fillRef>
+          <a:effectRef idx="2">
+            <a:schemeClr val="accent1"/>
+          </a:effectRef>
+          <a:fontRef idx="minor">
+            <a:schemeClr val="lt1"/>
+          </a:fontRef>
+        </p:style>
+        <p:txBody>
+          <a:bodyPr rtlCol="0" anchor="ctr" wrap="none"/>
+          <a:lstStyle/>
+          <a:p>
+            <a:pPr algn="ctr"/>
+            <a:r>
+              <a:rPr sz="1100" b="1">
+                <a:solidFill>
+                  <a:srgbClr val="FFFFFF"/>
+                </a:solidFill>
+                <a:latin typeface="Arial"/>
+              </a:rPr>
+              <a:t>PLACEHOLDER</a:t>
+            </a:r>
+          </a:p>
+        </p:txBody>
+      </p:sp>
+      <p:sp>
+        <p:nvSpPr>
+          <p:cNvPr id="8" name="TextBox 7"/>
+          <p:cNvSpPr txBox="1"/>
+          <p:nvPr/>
+        </p:nvSpPr>
+        <p:spPr>
+          <a:xfrm>
+            <a:off x="822960" y="1700000"/>
+            <a:ext cx="10515600" cy="4400000"/>
+          </a:xfrm>
+          <a:prstGeom prst="rect">
+            <a:avLst/>
+          </a:prstGeom>
+          <a:noFill/>
+        </p:spPr>
+        <p:txBody>
+          <a:bodyPr wrap="square">
+            <a:spAutoFit/>
+          </a:bodyPr>
+          <a:lstStyle/>
+          <a:p>
+            <a:pPr>
+              <a:spcAft>
+                <a:spcPts val="1000"/>
+              </a:spcAft>
+            </a:pPr>
+            <a:r>
+              <a:rPr sz="2000" b="1">
+                <a:solidFill>
+                  <a:srgbClr val="1F1F1F"/>
+                </a:solidFill>
+                <a:latin typeface="Arial"/>
+              </a:rPr>
+              <a:t>Intended: ~90-second SAME / DIFFERENT comparison clip (Week 6 Thursday).</a:t>
+            </a:r>
+          </a:p>
+          <a:p>
+            <a:pPr>
+              <a:spcAft>
+                <a:spcPts val="1000"/>
+              </a:spcAft>
+            </a:pPr>
+            <a:r>
+              <a:rPr sz="2000" b="0">
+                <a:solidFill>
+                  <a:srgbClr val="1F1F1F"/>
+                </a:solidFill>
+                <a:latin typeface="Arial"/>
+              </a:rPr>
+              <a:t>Script ready: production/media/scripts/unit-02/04-coal-vs-nuclear-final-script.md</a:t>
+            </a:r>
+          </a:p>
+          <a:p>
+            <a:pPr>
+              <a:spcAft>
+                <a:spcPts val="1000"/>
+              </a:spcAft>
+            </a:pPr>
+            <a:r>
+              <a:rPr sz="2000" b="0">
+                <a:solidFill>
+                  <a:srgbClr val="1F1F1F"/>
+                </a:solidFill>
+                <a:latin typeface="Arial"/>
+              </a:rPr>
+              <a:t>Covers: heat → steam → turbine → generator (SAME); heat source (DIFFERENT).</a:t>
+            </a:r>
+          </a:p>
+          <a:p>
+            <a:pPr>
+              <a:spcAft>
+                <a:spcPts val="1000"/>
+              </a:spcAft>
+            </a:pPr>
+            <a:r>
+              <a:rPr sz="2000" b="0">
+                <a:solidFill>
+                  <a:srgbClr val="1F1F1F"/>
+                </a:solidFill>
+                <a:latin typeface="Arial"/>
+              </a:rPr>
+              <a:t>This slide is a drop-in slot — the deck teaches fully without the video.</a:t>
             </a:r>
           </a:p>
         </p:txBody>

--- a/production/slides/04-u2-ch4-slides.pptx
+++ b/production/slides/04-u2-ch4-slides.pptx
@@ -123,6 +123,441 @@
     </a:lvl9pPr>
   </p:defaultTextStyle>
 </p:presentation>
+</file>
+
+<file path=ppt/notesMasters/notesMaster1.xml><?xml version="1.0" encoding="utf-8"?>
+<p:notesMaster xmlns:a="http://schemas.openxmlformats.org/drawingml/2006/main" xmlns:p="http://schemas.openxmlformats.org/presentationml/2006/main" xmlns:r="http://schemas.openxmlformats.org/officeDocument/2006/relationships">
+  <p:cSld>
+    <p:bg>
+      <p:bgRef idx="1001">
+        <a:schemeClr val="bg1"/>
+      </p:bgRef>
+    </p:bg>
+    <p:spTree>
+      <p:nvGrpSpPr>
+        <p:cNvPr id="1" name=""/>
+        <p:cNvGrpSpPr/>
+        <p:nvPr/>
+      </p:nvGrpSpPr>
+      <p:grpSpPr>
+        <a:xfrm>
+          <a:off x="0" y="0"/>
+          <a:ext cx="0" cy="0"/>
+          <a:chOff x="0" y="0"/>
+          <a:chExt cx="0" cy="0"/>
+        </a:xfrm>
+      </p:grpSpPr>
+      <p:sp>
+        <p:nvSpPr>
+          <p:cNvPr id="2" name="Header Placeholder 1"/>
+          <p:cNvSpPr>
+            <a:spLocks noGrp="1"/>
+          </p:cNvSpPr>
+          <p:nvPr>
+            <p:ph type="hdr" sz="quarter"/>
+          </p:nvPr>
+        </p:nvSpPr>
+        <p:spPr>
+          <a:xfrm>
+            <a:off x="0" y="0"/>
+            <a:ext cx="2971800" cy="457200"/>
+          </a:xfrm>
+          <a:prstGeom prst="rect">
+            <a:avLst/>
+          </a:prstGeom>
+        </p:spPr>
+        <p:txBody>
+          <a:bodyPr vert="horz" lIns="91440" tIns="45720" rIns="91440" bIns="45720" rtlCol="0"/>
+          <a:lstStyle>
+            <a:lvl1pPr algn="l">
+              <a:defRPr sz="1200"/>
+            </a:lvl1pPr>
+          </a:lstStyle>
+          <a:p>
+            <a:endParaRPr lang="en-US"/>
+          </a:p>
+        </p:txBody>
+      </p:sp>
+      <p:sp>
+        <p:nvSpPr>
+          <p:cNvPr id="3" name="Date Placeholder 2"/>
+          <p:cNvSpPr>
+            <a:spLocks noGrp="1"/>
+          </p:cNvSpPr>
+          <p:nvPr>
+            <p:ph type="dt" idx="1"/>
+          </p:nvPr>
+        </p:nvSpPr>
+        <p:spPr>
+          <a:xfrm>
+            <a:off x="3884613" y="0"/>
+            <a:ext cx="2971800" cy="457200"/>
+          </a:xfrm>
+          <a:prstGeom prst="rect">
+            <a:avLst/>
+          </a:prstGeom>
+        </p:spPr>
+        <p:txBody>
+          <a:bodyPr vert="horz" lIns="91440" tIns="45720" rIns="91440" bIns="45720" rtlCol="0"/>
+          <a:lstStyle>
+            <a:lvl1pPr algn="r">
+              <a:defRPr sz="1200"/>
+            </a:lvl1pPr>
+          </a:lstStyle>
+          <a:p>
+            <a:fld id="{0F89C1C7-3DCD-1040-A9CF-14679D8B5DDD}" type="datetimeFigureOut">
+              <a:rPr lang="en-US" smtClean="0"/>
+              <a:t>10/17/16</a:t>
+            </a:fld>
+            <a:endParaRPr lang="en-US"/>
+          </a:p>
+        </p:txBody>
+      </p:sp>
+      <p:sp>
+        <p:nvSpPr>
+          <p:cNvPr id="4" name="Slide Image Placeholder 3"/>
+          <p:cNvSpPr>
+            <a:spLocks noGrp="1" noRot="1" noChangeAspect="1"/>
+          </p:cNvSpPr>
+          <p:nvPr>
+            <p:ph type="sldImg" idx="2"/>
+          </p:nvPr>
+        </p:nvSpPr>
+        <p:spPr>
+          <a:xfrm>
+            <a:off x="1143000" y="685800"/>
+            <a:ext cx="4572000" cy="3429000"/>
+          </a:xfrm>
+          <a:prstGeom prst="rect">
+            <a:avLst/>
+          </a:prstGeom>
+          <a:noFill/>
+          <a:ln w="12700">
+            <a:solidFill>
+              <a:prstClr val="black"/>
+            </a:solidFill>
+          </a:ln>
+        </p:spPr>
+        <p:txBody>
+          <a:bodyPr vert="horz" lIns="91440" tIns="45720" rIns="91440" bIns="45720" rtlCol="0" anchor="ctr"/>
+          <a:lstStyle/>
+          <a:p>
+            <a:endParaRPr lang="en-US"/>
+          </a:p>
+        </p:txBody>
+      </p:sp>
+      <p:sp>
+        <p:nvSpPr>
+          <p:cNvPr id="5" name="Notes Placeholder 4"/>
+          <p:cNvSpPr>
+            <a:spLocks noGrp="1"/>
+          </p:cNvSpPr>
+          <p:nvPr>
+            <p:ph type="body" sz="quarter" idx="3"/>
+          </p:nvPr>
+        </p:nvSpPr>
+        <p:spPr>
+          <a:xfrm>
+            <a:off x="685800" y="4343400"/>
+            <a:ext cx="5486400" cy="4114800"/>
+          </a:xfrm>
+          <a:prstGeom prst="rect">
+            <a:avLst/>
+          </a:prstGeom>
+        </p:spPr>
+        <p:txBody>
+          <a:bodyPr vert="horz" lIns="91440" tIns="45720" rIns="91440" bIns="45720" rtlCol="0"/>
+          <a:lstStyle/>
+          <a:p>
+            <a:pPr lvl="0"/>
+            <a:r>
+              <a:rPr lang="en-US" smtClean="0"/>
+              <a:t>Click to edit Master text styles</a:t>
+            </a:r>
+          </a:p>
+          <a:p>
+            <a:pPr lvl="1"/>
+            <a:r>
+              <a:rPr lang="en-US" smtClean="0"/>
+              <a:t>Second level</a:t>
+            </a:r>
+          </a:p>
+          <a:p>
+            <a:pPr lvl="2"/>
+            <a:r>
+              <a:rPr lang="en-US" smtClean="0"/>
+              <a:t>Third level</a:t>
+            </a:r>
+          </a:p>
+          <a:p>
+            <a:pPr lvl="3"/>
+            <a:r>
+              <a:rPr lang="en-US" smtClean="0"/>
+              <a:t>Fourth level</a:t>
+            </a:r>
+          </a:p>
+          <a:p>
+            <a:pPr lvl="4"/>
+            <a:r>
+              <a:rPr lang="en-US" smtClean="0"/>
+              <a:t>Fifth level</a:t>
+            </a:r>
+            <a:endParaRPr lang="en-US"/>
+          </a:p>
+        </p:txBody>
+      </p:sp>
+      <p:sp>
+        <p:nvSpPr>
+          <p:cNvPr id="6" name="Footer Placeholder 5"/>
+          <p:cNvSpPr>
+            <a:spLocks noGrp="1"/>
+          </p:cNvSpPr>
+          <p:nvPr>
+            <p:ph type="ftr" sz="quarter" idx="4"/>
+          </p:nvPr>
+        </p:nvSpPr>
+        <p:spPr>
+          <a:xfrm>
+            <a:off x="0" y="8685213"/>
+            <a:ext cx="2971800" cy="457200"/>
+          </a:xfrm>
+          <a:prstGeom prst="rect">
+            <a:avLst/>
+          </a:prstGeom>
+        </p:spPr>
+        <p:txBody>
+          <a:bodyPr vert="horz" lIns="91440" tIns="45720" rIns="91440" bIns="45720" rtlCol="0" anchor="b"/>
+          <a:lstStyle>
+            <a:lvl1pPr algn="l">
+              <a:defRPr sz="1200"/>
+            </a:lvl1pPr>
+          </a:lstStyle>
+          <a:p>
+            <a:endParaRPr lang="en-US"/>
+          </a:p>
+        </p:txBody>
+      </p:sp>
+      <p:sp>
+        <p:nvSpPr>
+          <p:cNvPr id="7" name="Slide Number Placeholder 6"/>
+          <p:cNvSpPr>
+            <a:spLocks noGrp="1"/>
+          </p:cNvSpPr>
+          <p:nvPr>
+            <p:ph type="sldNum" sz="quarter" idx="5"/>
+          </p:nvPr>
+        </p:nvSpPr>
+        <p:spPr>
+          <a:xfrm>
+            <a:off x="3884613" y="8685213"/>
+            <a:ext cx="2971800" cy="457200"/>
+          </a:xfrm>
+          <a:prstGeom prst="rect">
+            <a:avLst/>
+          </a:prstGeom>
+        </p:spPr>
+        <p:txBody>
+          <a:bodyPr vert="horz" lIns="91440" tIns="45720" rIns="91440" bIns="45720" rtlCol="0" anchor="b"/>
+          <a:lstStyle>
+            <a:lvl1pPr algn="r">
+              <a:defRPr sz="1200"/>
+            </a:lvl1pPr>
+          </a:lstStyle>
+          <a:p>
+            <a:fld id="{BB5E49A5-4136-284D-997B-48E1D791AD67}" type="slidenum">
+              <a:rPr lang="en-US" smtClean="0"/>
+              <a:t>‹#›</a:t>
+            </a:fld>
+            <a:endParaRPr lang="en-US"/>
+          </a:p>
+        </p:txBody>
+      </p:sp>
+    </p:spTree>
+    <p:extLst>
+      <p:ext uri="{BB962C8B-B14F-4D97-AF65-F5344CB8AC3E}">
+        <p14:creationId xmlns:p14="http://schemas.microsoft.com/office/powerpoint/2010/main" val="2623252185"/>
+      </p:ext>
+    </p:extLst>
+  </p:cSld>
+  <p:clrMap bg1="lt1" tx1="dk1" bg2="lt2" tx2="dk2" accent1="accent1" accent2="accent2" accent3="accent3" accent4="accent4" accent5="accent5" accent6="accent6" hlink="hlink" folHlink="folHlink"/>
+  <p:notesStyle>
+    <a:lvl1pPr marL="0" algn="l" defTabSz="457200" rtl="0" eaLnBrk="1" latinLnBrk="0" hangingPunct="1">
+      <a:defRPr sz="1200" kern="1200">
+        <a:solidFill>
+          <a:schemeClr val="tx1"/>
+        </a:solidFill>
+        <a:latin typeface="+mn-lt"/>
+        <a:ea typeface="+mn-ea"/>
+        <a:cs typeface="+mn-cs"/>
+      </a:defRPr>
+    </a:lvl1pPr>
+    <a:lvl2pPr marL="457200" algn="l" defTabSz="457200" rtl="0" eaLnBrk="1" latinLnBrk="0" hangingPunct="1">
+      <a:defRPr sz="1200" kern="1200">
+        <a:solidFill>
+          <a:schemeClr val="tx1"/>
+        </a:solidFill>
+        <a:latin typeface="+mn-lt"/>
+        <a:ea typeface="+mn-ea"/>
+        <a:cs typeface="+mn-cs"/>
+      </a:defRPr>
+    </a:lvl2pPr>
+    <a:lvl3pPr marL="914400" algn="l" defTabSz="457200" rtl="0" eaLnBrk="1" latinLnBrk="0" hangingPunct="1">
+      <a:defRPr sz="1200" kern="1200">
+        <a:solidFill>
+          <a:schemeClr val="tx1"/>
+        </a:solidFill>
+        <a:latin typeface="+mn-lt"/>
+        <a:ea typeface="+mn-ea"/>
+        <a:cs typeface="+mn-cs"/>
+      </a:defRPr>
+    </a:lvl3pPr>
+    <a:lvl4pPr marL="1371600" algn="l" defTabSz="457200" rtl="0" eaLnBrk="1" latinLnBrk="0" hangingPunct="1">
+      <a:defRPr sz="1200" kern="1200">
+        <a:solidFill>
+          <a:schemeClr val="tx1"/>
+        </a:solidFill>
+        <a:latin typeface="+mn-lt"/>
+        <a:ea typeface="+mn-ea"/>
+        <a:cs typeface="+mn-cs"/>
+      </a:defRPr>
+    </a:lvl4pPr>
+    <a:lvl5pPr marL="1828800" algn="l" defTabSz="457200" rtl="0" eaLnBrk="1" latinLnBrk="0" hangingPunct="1">
+      <a:defRPr sz="1200" kern="1200">
+        <a:solidFill>
+          <a:schemeClr val="tx1"/>
+        </a:solidFill>
+        <a:latin typeface="+mn-lt"/>
+        <a:ea typeface="+mn-ea"/>
+        <a:cs typeface="+mn-cs"/>
+      </a:defRPr>
+    </a:lvl5pPr>
+    <a:lvl6pPr marL="2286000" algn="l" defTabSz="457200" rtl="0" eaLnBrk="1" latinLnBrk="0" hangingPunct="1">
+      <a:defRPr sz="1200" kern="1200">
+        <a:solidFill>
+          <a:schemeClr val="tx1"/>
+        </a:solidFill>
+        <a:latin typeface="+mn-lt"/>
+        <a:ea typeface="+mn-ea"/>
+        <a:cs typeface="+mn-cs"/>
+      </a:defRPr>
+    </a:lvl6pPr>
+    <a:lvl7pPr marL="2743200" algn="l" defTabSz="457200" rtl="0" eaLnBrk="1" latinLnBrk="0" hangingPunct="1">
+      <a:defRPr sz="1200" kern="1200">
+        <a:solidFill>
+          <a:schemeClr val="tx1"/>
+        </a:solidFill>
+        <a:latin typeface="+mn-lt"/>
+        <a:ea typeface="+mn-ea"/>
+        <a:cs typeface="+mn-cs"/>
+      </a:defRPr>
+    </a:lvl7pPr>
+    <a:lvl8pPr marL="3200400" algn="l" defTabSz="457200" rtl="0" eaLnBrk="1" latinLnBrk="0" hangingPunct="1">
+      <a:defRPr sz="1200" kern="1200">
+        <a:solidFill>
+          <a:schemeClr val="tx1"/>
+        </a:solidFill>
+        <a:latin typeface="+mn-lt"/>
+        <a:ea typeface="+mn-ea"/>
+        <a:cs typeface="+mn-cs"/>
+      </a:defRPr>
+    </a:lvl8pPr>
+    <a:lvl9pPr marL="3657600" algn="l" defTabSz="457200" rtl="0" eaLnBrk="1" latinLnBrk="0" hangingPunct="1">
+      <a:defRPr sz="1200" kern="1200">
+        <a:solidFill>
+          <a:schemeClr val="tx1"/>
+        </a:solidFill>
+        <a:latin typeface="+mn-lt"/>
+        <a:ea typeface="+mn-ea"/>
+        <a:cs typeface="+mn-cs"/>
+      </a:defRPr>
+    </a:lvl9pPr>
+  </p:notesStyle>
+</p:notesMaster>
+</file>
+
+<file path=ppt/notesSlides/notesSlide1.xml><?xml version="1.0" encoding="utf-8"?>
+<p:notes xmlns:a="http://schemas.openxmlformats.org/drawingml/2006/main" xmlns:p="http://schemas.openxmlformats.org/presentationml/2006/main" xmlns:r="http://schemas.openxmlformats.org/officeDocument/2006/relationships">
+  <p:cSld>
+    <p:spTree>
+      <p:nvGrpSpPr>
+        <p:cNvPr id="1" name=""/>
+        <p:cNvGrpSpPr/>
+        <p:nvPr/>
+      </p:nvGrpSpPr>
+      <p:grpSpPr>
+        <a:xfrm>
+          <a:off x="0" y="0"/>
+          <a:ext cx="0" cy="0"/>
+          <a:chOff x="0" y="0"/>
+          <a:chExt cx="0" cy="0"/>
+        </a:xfrm>
+      </p:grpSpPr>
+      <p:sp>
+        <p:nvSpPr>
+          <p:cNvPr id="2" name="Slide Image Placeholder 1"/>
+          <p:cNvSpPr>
+            <a:spLocks noGrp="1"/>
+          </p:cNvSpPr>
+          <p:nvPr>
+            <p:ph type="sldImg" idx="2"/>
+          </p:nvPr>
+        </p:nvSpPr>
+        <p:spPr/>
+      </p:sp>
+      <p:sp>
+        <p:nvSpPr>
+          <p:cNvPr id="3" name="Notes Placeholder 2"/>
+          <p:cNvSpPr>
+            <a:spLocks noGrp="1"/>
+          </p:cNvSpPr>
+          <p:nvPr>
+            <p:ph type="body" idx="3" sz="quarter"/>
+          </p:nvPr>
+        </p:nvSpPr>
+        <p:spPr/>
+        <p:txBody>
+          <a:bodyPr/>
+          <a:lstStyle/>
+          <a:p>
+            <a:r>
+              <a:t>Intended: ~90-second SAME / DIFFERENT comparison clip (Week 6 Thursday).</a:t>
+            </a:r>
+          </a:p>
+          <a:p>
+            <a:r>
+              <a:t>Script ready: production/media/scripts/unit-02/04-coal-vs-nuclear-final-script.md</a:t>
+            </a:r>
+          </a:p>
+          <a:p>
+            <a:r>
+              <a:t>Covers: heat → steam → turbine → generator (SAME); heat source (DIFFERENT).</a:t>
+            </a:r>
+          </a:p>
+          <a:p>
+            <a:r>
+              <a:t>This slide is a drop-in slot — the deck teaches fully without the video.</a:t>
+            </a:r>
+          </a:p>
+        </p:txBody>
+      </p:sp>
+      <p:sp>
+        <p:nvSpPr>
+          <p:cNvPr id="4" name="Slide Number Placeholder 3"/>
+          <p:cNvSpPr>
+            <a:spLocks noGrp="1"/>
+          </p:cNvSpPr>
+          <p:nvPr>
+            <p:ph type="sldNum" idx="5" sz="quarter"/>
+          </p:nvPr>
+        </p:nvSpPr>
+        <p:spPr/>
+      </p:sp>
+    </p:spTree>
+  </p:cSld>
+  <p:clrMapOvr>
+    <a:masterClrMapping/>
+  </p:clrMapOvr>
+</p:notes>
 </file>
 
 <file path=ppt/slideLayouts/slideLayout1.xml><?xml version="1.0" encoding="utf-8"?>
@@ -3388,7 +3823,7 @@
             <a:avLst/>
           </a:prstGeom>
           <a:solidFill>
-            <a:srgbClr val="3E7A4E"/>
+            <a:srgbClr val="2F3C7E"/>
           </a:solidFill>
           <a:ln>
             <a:noFill/>
@@ -3451,7 +3886,7 @@
                 </a:solidFill>
                 <a:latin typeface="Arial"/>
               </a:rPr>
-              <a:t>Answer</a:t>
+              <a:t>Review</a:t>
             </a:r>
           </a:p>
         </p:txBody>
@@ -3486,11 +3921,11 @@
             <a:r>
               <a:rPr sz="1400" b="0" i="0">
                 <a:solidFill>
-                  <a:srgbClr val="FFFFFF"/>
-                </a:solidFill>
-                <a:latin typeface="Arial"/>
-              </a:rPr>
-              <a:t>10</a:t>
+                  <a:srgbClr val="C9D2E8"/>
+                </a:solidFill>
+                <a:latin typeface="Arial"/>
+              </a:rPr>
+              <a:t>9</a:t>
             </a:r>
           </a:p>
         </p:txBody>
@@ -3503,8 +3938,8 @@
         </p:nvSpPr>
         <p:spPr>
           <a:xfrm>
-            <a:off x="822960" y="1645920"/>
-            <a:ext cx="10515600" cy="1828800"/>
+            <a:off x="822960" y="1463040"/>
+            <a:ext cx="10515600" cy="1188720"/>
           </a:xfrm>
           <a:prstGeom prst="rect">
             <a:avLst/>
@@ -3529,7 +3964,94 @@
                 </a:solidFill>
                 <a:latin typeface="Arial"/>
               </a:rPr>
-              <a:t>B. Heat boils water into steam that spins a turbine.</a:t>
+              <a:t>Nuclear power plants make electricity using —</a:t>
+            </a:r>
+          </a:p>
+        </p:txBody>
+      </p:sp>
+      <p:sp>
+        <p:nvSpPr>
+          <p:cNvPr id="7" name="TextBox 6"/>
+          <p:cNvSpPr txBox="1"/>
+          <p:nvPr/>
+        </p:nvSpPr>
+        <p:spPr>
+          <a:xfrm>
+            <a:off x="822960" y="2834640"/>
+            <a:ext cx="10515600" cy="3108960"/>
+          </a:xfrm>
+          <a:prstGeom prst="rect">
+            <a:avLst/>
+          </a:prstGeom>
+          <a:noFill/>
+        </p:spPr>
+        <p:txBody>
+          <a:bodyPr wrap="square" anchor="t">
+            <a:spAutoFit/>
+          </a:bodyPr>
+          <a:lstStyle/>
+          <a:p>
+            <a:pPr algn="l">
+              <a:spcAft>
+                <a:spcPts val="400"/>
+              </a:spcAft>
+            </a:pPr>
+            <a:r>
+              <a:rPr sz="2800" b="0" i="0">
+                <a:solidFill>
+                  <a:srgbClr val="1F1F1F"/>
+                </a:solidFill>
+                <a:latin typeface="Arial"/>
+              </a:rPr>
+              <a:t>A.  wind</a:t>
+            </a:r>
+          </a:p>
+          <a:p>
+            <a:pPr algn="l">
+              <a:spcAft>
+                <a:spcPts val="400"/>
+              </a:spcAft>
+            </a:pPr>
+            <a:r>
+              <a:rPr sz="2800" b="0" i="0">
+                <a:solidFill>
+                  <a:srgbClr val="1F1F1F"/>
+                </a:solidFill>
+                <a:latin typeface="Arial"/>
+              </a:rPr>
+              <a:t>B.  heat from boiling water into steam</a:t>
+            </a:r>
+          </a:p>
+          <a:p>
+            <a:pPr algn="l">
+              <a:spcAft>
+                <a:spcPts val="400"/>
+              </a:spcAft>
+            </a:pPr>
+            <a:r>
+              <a:rPr sz="2800" b="0" i="0">
+                <a:solidFill>
+                  <a:srgbClr val="1F1F1F"/>
+                </a:solidFill>
+                <a:latin typeface="Arial"/>
+              </a:rPr>
+              <a:t>C.  sunlight</a:t>
+            </a:r>
+          </a:p>
+          <a:p>
+            <a:pPr algn="l">
+              <a:spcAft>
+                <a:spcPts val="400"/>
+              </a:spcAft>
+            </a:pPr>
+            <a:r>
+              <a:rPr sz="2800" b="0" i="0">
+                <a:solidFill>
+                  <a:srgbClr val="1F1F1F"/>
+                </a:solidFill>
+                <a:latin typeface="Arial"/>
+              </a:rPr>
+              <a:t>D.  coal</a:t>
             </a:r>
           </a:p>
         </p:txBody>
@@ -3611,7 +4133,7 @@
             <a:avLst/>
           </a:prstGeom>
           <a:solidFill>
-            <a:srgbClr val="2F3C7E"/>
+            <a:srgbClr val="3E7A4E"/>
           </a:solidFill>
           <a:ln>
             <a:noFill/>
@@ -3674,7 +4196,7 @@
                 </a:solidFill>
                 <a:latin typeface="Arial"/>
               </a:rPr>
-              <a:t>Review</a:t>
+              <a:t>Answer</a:t>
             </a:r>
           </a:p>
         </p:txBody>
@@ -3709,11 +4231,11 @@
             <a:r>
               <a:rPr sz="1400" b="0" i="0">
                 <a:solidFill>
-                  <a:srgbClr val="C9D2E8"/>
-                </a:solidFill>
-                <a:latin typeface="Arial"/>
-              </a:rPr>
-              <a:t>11</a:t>
+                  <a:srgbClr val="FFFFFF"/>
+                </a:solidFill>
+                <a:latin typeface="Arial"/>
+              </a:rPr>
+              <a:t>10</a:t>
             </a:r>
           </a:p>
         </p:txBody>
@@ -3726,8 +4248,8 @@
         </p:nvSpPr>
         <p:spPr>
           <a:xfrm>
-            <a:off x="822960" y="1463040"/>
-            <a:ext cx="10515600" cy="1188720"/>
+            <a:off x="822960" y="1645920"/>
+            <a:ext cx="10515600" cy="1828800"/>
           </a:xfrm>
           <a:prstGeom prst="rect">
             <a:avLst/>
@@ -3752,94 +4274,7 @@
                 </a:solidFill>
                 <a:latin typeface="Arial"/>
               </a:rPr>
-              <a:t>Uranium is —</a:t>
-            </a:r>
-          </a:p>
-        </p:txBody>
-      </p:sp>
-      <p:sp>
-        <p:nvSpPr>
-          <p:cNvPr id="7" name="TextBox 6"/>
-          <p:cNvSpPr txBox="1"/>
-          <p:nvPr/>
-        </p:nvSpPr>
-        <p:spPr>
-          <a:xfrm>
-            <a:off x="822960" y="2834640"/>
-            <a:ext cx="10515600" cy="3108960"/>
-          </a:xfrm>
-          <a:prstGeom prst="rect">
-            <a:avLst/>
-          </a:prstGeom>
-          <a:noFill/>
-        </p:spPr>
-        <p:txBody>
-          <a:bodyPr wrap="square" anchor="t">
-            <a:spAutoFit/>
-          </a:bodyPr>
-          <a:lstStyle/>
-          <a:p>
-            <a:pPr algn="l">
-              <a:spcAft>
-                <a:spcPts val="400"/>
-              </a:spcAft>
-            </a:pPr>
-            <a:r>
-              <a:rPr sz="2800" b="0" i="0">
-                <a:solidFill>
-                  <a:srgbClr val="1F1F1F"/>
-                </a:solidFill>
-                <a:latin typeface="Arial"/>
-              </a:rPr>
-              <a:t>A.  renewable</a:t>
-            </a:r>
-          </a:p>
-          <a:p>
-            <a:pPr algn="l">
-              <a:spcAft>
-                <a:spcPts val="400"/>
-              </a:spcAft>
-            </a:pPr>
-            <a:r>
-              <a:rPr sz="2800" b="0" i="0">
-                <a:solidFill>
-                  <a:srgbClr val="1F1F1F"/>
-                </a:solidFill>
-                <a:latin typeface="Arial"/>
-              </a:rPr>
-              <a:t>B.  a fossil fuel</a:t>
-            </a:r>
-          </a:p>
-          <a:p>
-            <a:pPr algn="l">
-              <a:spcAft>
-                <a:spcPts val="400"/>
-              </a:spcAft>
-            </a:pPr>
-            <a:r>
-              <a:rPr sz="2800" b="0" i="0">
-                <a:solidFill>
-                  <a:srgbClr val="1F1F1F"/>
-                </a:solidFill>
-                <a:latin typeface="Arial"/>
-              </a:rPr>
-              <a:t>C.  a mined material used for nuclear energy</a:t>
-            </a:r>
-          </a:p>
-          <a:p>
-            <a:pPr algn="l">
-              <a:spcAft>
-                <a:spcPts val="400"/>
-              </a:spcAft>
-            </a:pPr>
-            <a:r>
-              <a:rPr sz="2800" b="0" i="0">
-                <a:solidFill>
-                  <a:srgbClr val="1F1F1F"/>
-                </a:solidFill>
-                <a:latin typeface="Arial"/>
-              </a:rPr>
-              <a:t>D.  a gas</a:t>
+              <a:t>B. Heat boils water into steam that spins a turbine.</a:t>
             </a:r>
           </a:p>
         </p:txBody>
@@ -3921,7 +4356,7 @@
             <a:avLst/>
           </a:prstGeom>
           <a:solidFill>
-            <a:srgbClr val="3E7A4E"/>
+            <a:srgbClr val="2F3C7E"/>
           </a:solidFill>
           <a:ln>
             <a:noFill/>
@@ -3984,7 +4419,7 @@
                 </a:solidFill>
                 <a:latin typeface="Arial"/>
               </a:rPr>
-              <a:t>Answer</a:t>
+              <a:t>Review</a:t>
             </a:r>
           </a:p>
         </p:txBody>
@@ -4019,11 +4454,11 @@
             <a:r>
               <a:rPr sz="1400" b="0" i="0">
                 <a:solidFill>
-                  <a:srgbClr val="FFFFFF"/>
-                </a:solidFill>
-                <a:latin typeface="Arial"/>
-              </a:rPr>
-              <a:t>12</a:t>
+                  <a:srgbClr val="C9D2E8"/>
+                </a:solidFill>
+                <a:latin typeface="Arial"/>
+              </a:rPr>
+              <a:t>11</a:t>
             </a:r>
           </a:p>
         </p:txBody>
@@ -4036,8 +4471,8 @@
         </p:nvSpPr>
         <p:spPr>
           <a:xfrm>
-            <a:off x="822960" y="1645920"/>
-            <a:ext cx="10515600" cy="1828800"/>
+            <a:off x="822960" y="1463040"/>
+            <a:ext cx="10515600" cy="1188720"/>
           </a:xfrm>
           <a:prstGeom prst="rect">
             <a:avLst/>
@@ -4062,7 +4497,94 @@
                 </a:solidFill>
                 <a:latin typeface="Arial"/>
               </a:rPr>
-              <a:t>C. Uranium is mined from rock.</a:t>
+              <a:t>Uranium is —</a:t>
+            </a:r>
+          </a:p>
+        </p:txBody>
+      </p:sp>
+      <p:sp>
+        <p:nvSpPr>
+          <p:cNvPr id="7" name="TextBox 6"/>
+          <p:cNvSpPr txBox="1"/>
+          <p:nvPr/>
+        </p:nvSpPr>
+        <p:spPr>
+          <a:xfrm>
+            <a:off x="822960" y="2834640"/>
+            <a:ext cx="10515600" cy="3108960"/>
+          </a:xfrm>
+          <a:prstGeom prst="rect">
+            <a:avLst/>
+          </a:prstGeom>
+          <a:noFill/>
+        </p:spPr>
+        <p:txBody>
+          <a:bodyPr wrap="square" anchor="t">
+            <a:spAutoFit/>
+          </a:bodyPr>
+          <a:lstStyle/>
+          <a:p>
+            <a:pPr algn="l">
+              <a:spcAft>
+                <a:spcPts val="400"/>
+              </a:spcAft>
+            </a:pPr>
+            <a:r>
+              <a:rPr sz="2800" b="0" i="0">
+                <a:solidFill>
+                  <a:srgbClr val="1F1F1F"/>
+                </a:solidFill>
+                <a:latin typeface="Arial"/>
+              </a:rPr>
+              <a:t>A.  renewable</a:t>
+            </a:r>
+          </a:p>
+          <a:p>
+            <a:pPr algn="l">
+              <a:spcAft>
+                <a:spcPts val="400"/>
+              </a:spcAft>
+            </a:pPr>
+            <a:r>
+              <a:rPr sz="2800" b="0" i="0">
+                <a:solidFill>
+                  <a:srgbClr val="1F1F1F"/>
+                </a:solidFill>
+                <a:latin typeface="Arial"/>
+              </a:rPr>
+              <a:t>B.  a fossil fuel</a:t>
+            </a:r>
+          </a:p>
+          <a:p>
+            <a:pPr algn="l">
+              <a:spcAft>
+                <a:spcPts val="400"/>
+              </a:spcAft>
+            </a:pPr>
+            <a:r>
+              <a:rPr sz="2800" b="0" i="0">
+                <a:solidFill>
+                  <a:srgbClr val="1F1F1F"/>
+                </a:solidFill>
+                <a:latin typeface="Arial"/>
+              </a:rPr>
+              <a:t>C.  a mined material used for nuclear energy</a:t>
+            </a:r>
+          </a:p>
+          <a:p>
+            <a:pPr algn="l">
+              <a:spcAft>
+                <a:spcPts val="400"/>
+              </a:spcAft>
+            </a:pPr>
+            <a:r>
+              <a:rPr sz="2800" b="0" i="0">
+                <a:solidFill>
+                  <a:srgbClr val="1F1F1F"/>
+                </a:solidFill>
+                <a:latin typeface="Arial"/>
+              </a:rPr>
+              <a:t>D.  a gas</a:t>
             </a:r>
           </a:p>
         </p:txBody>
@@ -4144,7 +4666,7 @@
             <a:avLst/>
           </a:prstGeom>
           <a:solidFill>
-            <a:srgbClr val="2F3C7E"/>
+            <a:srgbClr val="3E7A4E"/>
           </a:solidFill>
           <a:ln>
             <a:noFill/>
@@ -4207,7 +4729,7 @@
                 </a:solidFill>
                 <a:latin typeface="Arial"/>
               </a:rPr>
-              <a:t>Review</a:t>
+              <a:t>Answer</a:t>
             </a:r>
           </a:p>
         </p:txBody>
@@ -4242,11 +4764,11 @@
             <a:r>
               <a:rPr sz="1400" b="0" i="0">
                 <a:solidFill>
-                  <a:srgbClr val="C9D2E8"/>
-                </a:solidFill>
-                <a:latin typeface="Arial"/>
-              </a:rPr>
-              <a:t>13</a:t>
+                  <a:srgbClr val="FFFFFF"/>
+                </a:solidFill>
+                <a:latin typeface="Arial"/>
+              </a:rPr>
+              <a:t>12</a:t>
             </a:r>
           </a:p>
         </p:txBody>
@@ -4259,8 +4781,8 @@
         </p:nvSpPr>
         <p:spPr>
           <a:xfrm>
-            <a:off x="822960" y="1463040"/>
-            <a:ext cx="10515600" cy="1188720"/>
+            <a:off x="822960" y="1645920"/>
+            <a:ext cx="10515600" cy="1828800"/>
           </a:xfrm>
           <a:prstGeom prst="rect">
             <a:avLst/>
@@ -4285,94 +4807,7 @@
                 </a:solidFill>
                 <a:latin typeface="Arial"/>
               </a:rPr>
-              <a:t>A nuclear plant and a coal plant both use —</a:t>
-            </a:r>
-          </a:p>
-        </p:txBody>
-      </p:sp>
-      <p:sp>
-        <p:nvSpPr>
-          <p:cNvPr id="7" name="TextBox 6"/>
-          <p:cNvSpPr txBox="1"/>
-          <p:nvPr/>
-        </p:nvSpPr>
-        <p:spPr>
-          <a:xfrm>
-            <a:off x="822960" y="2834640"/>
-            <a:ext cx="10515600" cy="3108960"/>
-          </a:xfrm>
-          <a:prstGeom prst="rect">
-            <a:avLst/>
-          </a:prstGeom>
-          <a:noFill/>
-        </p:spPr>
-        <p:txBody>
-          <a:bodyPr wrap="square" anchor="t">
-            <a:spAutoFit/>
-          </a:bodyPr>
-          <a:lstStyle/>
-          <a:p>
-            <a:pPr algn="l">
-              <a:spcAft>
-                <a:spcPts val="400"/>
-              </a:spcAft>
-            </a:pPr>
-            <a:r>
-              <a:rPr sz="2800" b="0" i="0">
-                <a:solidFill>
-                  <a:srgbClr val="1F1F1F"/>
-                </a:solidFill>
-                <a:latin typeface="Arial"/>
-              </a:rPr>
-              <a:t>A.  uranium</a:t>
-            </a:r>
-          </a:p>
-          <a:p>
-            <a:pPr algn="l">
-              <a:spcAft>
-                <a:spcPts val="400"/>
-              </a:spcAft>
-            </a:pPr>
-            <a:r>
-              <a:rPr sz="2800" b="0" i="0">
-                <a:solidFill>
-                  <a:srgbClr val="1F1F1F"/>
-                </a:solidFill>
-                <a:latin typeface="Arial"/>
-              </a:rPr>
-              <a:t>B.  a steam-spun turbine and generator</a:t>
-            </a:r>
-          </a:p>
-          <a:p>
-            <a:pPr algn="l">
-              <a:spcAft>
-                <a:spcPts val="400"/>
-              </a:spcAft>
-            </a:pPr>
-            <a:r>
-              <a:rPr sz="2800" b="0" i="0">
-                <a:solidFill>
-                  <a:srgbClr val="1F1F1F"/>
-                </a:solidFill>
-                <a:latin typeface="Arial"/>
-              </a:rPr>
-              <a:t>C.  solar cells</a:t>
-            </a:r>
-          </a:p>
-          <a:p>
-            <a:pPr algn="l">
-              <a:spcAft>
-                <a:spcPts val="400"/>
-              </a:spcAft>
-            </a:pPr>
-            <a:r>
-              <a:rPr sz="2800" b="0" i="0">
-                <a:solidFill>
-                  <a:srgbClr val="1F1F1F"/>
-                </a:solidFill>
-                <a:latin typeface="Arial"/>
-              </a:rPr>
-              <a:t>D.  wind</a:t>
+              <a:t>C. Uranium is mined from rock.</a:t>
             </a:r>
           </a:p>
         </p:txBody>
@@ -4454,7 +4889,7 @@
             <a:avLst/>
           </a:prstGeom>
           <a:solidFill>
-            <a:srgbClr val="3E7A4E"/>
+            <a:srgbClr val="2F3C7E"/>
           </a:solidFill>
           <a:ln>
             <a:noFill/>
@@ -4517,7 +4952,7 @@
                 </a:solidFill>
                 <a:latin typeface="Arial"/>
               </a:rPr>
-              <a:t>Answer</a:t>
+              <a:t>Review</a:t>
             </a:r>
           </a:p>
         </p:txBody>
@@ -4552,11 +4987,11 @@
             <a:r>
               <a:rPr sz="1400" b="0" i="0">
                 <a:solidFill>
-                  <a:srgbClr val="FFFFFF"/>
-                </a:solidFill>
-                <a:latin typeface="Arial"/>
-              </a:rPr>
-              <a:t>14</a:t>
+                  <a:srgbClr val="C9D2E8"/>
+                </a:solidFill>
+                <a:latin typeface="Arial"/>
+              </a:rPr>
+              <a:t>13</a:t>
             </a:r>
           </a:p>
         </p:txBody>
@@ -4569,8 +5004,8 @@
         </p:nvSpPr>
         <p:spPr>
           <a:xfrm>
-            <a:off x="822960" y="1645920"/>
-            <a:ext cx="10515600" cy="1828800"/>
+            <a:off x="822960" y="1463040"/>
+            <a:ext cx="10515600" cy="1188720"/>
           </a:xfrm>
           <a:prstGeom prst="rect">
             <a:avLst/>
@@ -4595,7 +5030,94 @@
                 </a:solidFill>
                 <a:latin typeface="Arial"/>
               </a:rPr>
-              <a:t>B. Both use the heat → steam → turbine → generator pathway.</a:t>
+              <a:t>A nuclear plant and a coal plant both use —</a:t>
+            </a:r>
+          </a:p>
+        </p:txBody>
+      </p:sp>
+      <p:sp>
+        <p:nvSpPr>
+          <p:cNvPr id="7" name="TextBox 6"/>
+          <p:cNvSpPr txBox="1"/>
+          <p:nvPr/>
+        </p:nvSpPr>
+        <p:spPr>
+          <a:xfrm>
+            <a:off x="822960" y="2834640"/>
+            <a:ext cx="10515600" cy="3108960"/>
+          </a:xfrm>
+          <a:prstGeom prst="rect">
+            <a:avLst/>
+          </a:prstGeom>
+          <a:noFill/>
+        </p:spPr>
+        <p:txBody>
+          <a:bodyPr wrap="square" anchor="t">
+            <a:spAutoFit/>
+          </a:bodyPr>
+          <a:lstStyle/>
+          <a:p>
+            <a:pPr algn="l">
+              <a:spcAft>
+                <a:spcPts val="400"/>
+              </a:spcAft>
+            </a:pPr>
+            <a:r>
+              <a:rPr sz="2800" b="0" i="0">
+                <a:solidFill>
+                  <a:srgbClr val="1F1F1F"/>
+                </a:solidFill>
+                <a:latin typeface="Arial"/>
+              </a:rPr>
+              <a:t>A.  uranium</a:t>
+            </a:r>
+          </a:p>
+          <a:p>
+            <a:pPr algn="l">
+              <a:spcAft>
+                <a:spcPts val="400"/>
+              </a:spcAft>
+            </a:pPr>
+            <a:r>
+              <a:rPr sz="2800" b="0" i="0">
+                <a:solidFill>
+                  <a:srgbClr val="1F1F1F"/>
+                </a:solidFill>
+                <a:latin typeface="Arial"/>
+              </a:rPr>
+              <a:t>B.  a steam-spun turbine and generator</a:t>
+            </a:r>
+          </a:p>
+          <a:p>
+            <a:pPr algn="l">
+              <a:spcAft>
+                <a:spcPts val="400"/>
+              </a:spcAft>
+            </a:pPr>
+            <a:r>
+              <a:rPr sz="2800" b="0" i="0">
+                <a:solidFill>
+                  <a:srgbClr val="1F1F1F"/>
+                </a:solidFill>
+                <a:latin typeface="Arial"/>
+              </a:rPr>
+              <a:t>C.  solar cells</a:t>
+            </a:r>
+          </a:p>
+          <a:p>
+            <a:pPr algn="l">
+              <a:spcAft>
+                <a:spcPts val="400"/>
+              </a:spcAft>
+            </a:pPr>
+            <a:r>
+              <a:rPr sz="2800" b="0" i="0">
+                <a:solidFill>
+                  <a:srgbClr val="1F1F1F"/>
+                </a:solidFill>
+                <a:latin typeface="Arial"/>
+              </a:rPr>
+              <a:t>D.  wind</a:t>
             </a:r>
           </a:p>
         </p:txBody>
@@ -4677,7 +5199,7 @@
             <a:avLst/>
           </a:prstGeom>
           <a:solidFill>
-            <a:srgbClr val="2F3C7E"/>
+            <a:srgbClr val="3E7A4E"/>
           </a:solidFill>
           <a:ln>
             <a:noFill/>
@@ -4740,7 +5262,7 @@
                 </a:solidFill>
                 <a:latin typeface="Arial"/>
               </a:rPr>
-              <a:t>Review</a:t>
+              <a:t>Answer</a:t>
             </a:r>
           </a:p>
         </p:txBody>
@@ -4775,11 +5297,11 @@
             <a:r>
               <a:rPr sz="1400" b="0" i="0">
                 <a:solidFill>
-                  <a:srgbClr val="C9D2E8"/>
-                </a:solidFill>
-                <a:latin typeface="Arial"/>
-              </a:rPr>
-              <a:t>15</a:t>
+                  <a:srgbClr val="FFFFFF"/>
+                </a:solidFill>
+                <a:latin typeface="Arial"/>
+              </a:rPr>
+              <a:t>14</a:t>
             </a:r>
           </a:p>
         </p:txBody>
@@ -4792,8 +5314,8 @@
         </p:nvSpPr>
         <p:spPr>
           <a:xfrm>
-            <a:off x="822960" y="1463040"/>
-            <a:ext cx="10515600" cy="1188720"/>
+            <a:off x="822960" y="1645920"/>
+            <a:ext cx="10515600" cy="1828800"/>
           </a:xfrm>
           <a:prstGeom prst="rect">
             <a:avLst/>
@@ -4818,94 +5340,7 @@
                 </a:solidFill>
                 <a:latin typeface="Arial"/>
               </a:rPr>
-              <a:t>Which is a LIMITATION of nuclear power?</a:t>
-            </a:r>
-          </a:p>
-        </p:txBody>
-      </p:sp>
-      <p:sp>
-        <p:nvSpPr>
-          <p:cNvPr id="7" name="TextBox 6"/>
-          <p:cNvSpPr txBox="1"/>
-          <p:nvPr/>
-        </p:nvSpPr>
-        <p:spPr>
-          <a:xfrm>
-            <a:off x="822960" y="2834640"/>
-            <a:ext cx="10515600" cy="3108960"/>
-          </a:xfrm>
-          <a:prstGeom prst="rect">
-            <a:avLst/>
-          </a:prstGeom>
-          <a:noFill/>
-        </p:spPr>
-        <p:txBody>
-          <a:bodyPr wrap="square" anchor="t">
-            <a:spAutoFit/>
-          </a:bodyPr>
-          <a:lstStyle/>
-          <a:p>
-            <a:pPr algn="l">
-              <a:spcAft>
-                <a:spcPts val="400"/>
-              </a:spcAft>
-            </a:pPr>
-            <a:r>
-              <a:rPr sz="2800" b="0" i="0">
-                <a:solidFill>
-                  <a:srgbClr val="1F1F1F"/>
-                </a:solidFill>
-                <a:latin typeface="Arial"/>
-              </a:rPr>
-              <a:t>A.  reliable electricity</a:t>
-            </a:r>
-          </a:p>
-          <a:p>
-            <a:pPr algn="l">
-              <a:spcAft>
-                <a:spcPts val="400"/>
-              </a:spcAft>
-            </a:pPr>
-            <a:r>
-              <a:rPr sz="2800" b="0" i="0">
-                <a:solidFill>
-                  <a:srgbClr val="1F1F1F"/>
-                </a:solidFill>
-                <a:latin typeface="Arial"/>
-              </a:rPr>
-              <a:t>B.  little air pollution</a:t>
-            </a:r>
-          </a:p>
-          <a:p>
-            <a:pPr algn="l">
-              <a:spcAft>
-                <a:spcPts val="400"/>
-              </a:spcAft>
-            </a:pPr>
-            <a:r>
-              <a:rPr sz="2800" b="0" i="0">
-                <a:solidFill>
-                  <a:srgbClr val="1F1F1F"/>
-                </a:solidFill>
-                <a:latin typeface="Arial"/>
-              </a:rPr>
-              <a:t>C.  used fuel stays dangerous a long time</a:t>
-            </a:r>
-          </a:p>
-          <a:p>
-            <a:pPr algn="l">
-              <a:spcAft>
-                <a:spcPts val="400"/>
-              </a:spcAft>
-            </a:pPr>
-            <a:r>
-              <a:rPr sz="2800" b="0" i="0">
-                <a:solidFill>
-                  <a:srgbClr val="1F1F1F"/>
-                </a:solidFill>
-                <a:latin typeface="Arial"/>
-              </a:rPr>
-              <a:t>D.  it heats homes</a:t>
+              <a:t>B. Both use the heat → steam → turbine → generator pathway.</a:t>
             </a:r>
           </a:p>
         </p:txBody>
@@ -4987,7 +5422,7 @@
             <a:avLst/>
           </a:prstGeom>
           <a:solidFill>
-            <a:srgbClr val="3E7A4E"/>
+            <a:srgbClr val="2F3C7E"/>
           </a:solidFill>
           <a:ln>
             <a:noFill/>
@@ -5050,7 +5485,7 @@
                 </a:solidFill>
                 <a:latin typeface="Arial"/>
               </a:rPr>
-              <a:t>Answer</a:t>
+              <a:t>Review</a:t>
             </a:r>
           </a:p>
         </p:txBody>
@@ -5085,11 +5520,11 @@
             <a:r>
               <a:rPr sz="1400" b="0" i="0">
                 <a:solidFill>
-                  <a:srgbClr val="FFFFFF"/>
-                </a:solidFill>
-                <a:latin typeface="Arial"/>
-              </a:rPr>
-              <a:t>16</a:t>
+                  <a:srgbClr val="C9D2E8"/>
+                </a:solidFill>
+                <a:latin typeface="Arial"/>
+              </a:rPr>
+              <a:t>15</a:t>
             </a:r>
           </a:p>
         </p:txBody>
@@ -5102,8 +5537,8 @@
         </p:nvSpPr>
         <p:spPr>
           <a:xfrm>
-            <a:off x="822960" y="1645920"/>
-            <a:ext cx="10515600" cy="1828800"/>
+            <a:off x="822960" y="1463040"/>
+            <a:ext cx="10515600" cy="1188720"/>
           </a:xfrm>
           <a:prstGeom prst="rect">
             <a:avLst/>
@@ -5128,7 +5563,94 @@
                 </a:solidFill>
                 <a:latin typeface="Arial"/>
               </a:rPr>
-              <a:t>C. Used fuel must be stored safely for a very long time.</a:t>
+              <a:t>Which is a LIMITATION of nuclear power?</a:t>
+            </a:r>
+          </a:p>
+        </p:txBody>
+      </p:sp>
+      <p:sp>
+        <p:nvSpPr>
+          <p:cNvPr id="7" name="TextBox 6"/>
+          <p:cNvSpPr txBox="1"/>
+          <p:nvPr/>
+        </p:nvSpPr>
+        <p:spPr>
+          <a:xfrm>
+            <a:off x="822960" y="2834640"/>
+            <a:ext cx="10515600" cy="3108960"/>
+          </a:xfrm>
+          <a:prstGeom prst="rect">
+            <a:avLst/>
+          </a:prstGeom>
+          <a:noFill/>
+        </p:spPr>
+        <p:txBody>
+          <a:bodyPr wrap="square" anchor="t">
+            <a:spAutoFit/>
+          </a:bodyPr>
+          <a:lstStyle/>
+          <a:p>
+            <a:pPr algn="l">
+              <a:spcAft>
+                <a:spcPts val="400"/>
+              </a:spcAft>
+            </a:pPr>
+            <a:r>
+              <a:rPr sz="2800" b="0" i="0">
+                <a:solidFill>
+                  <a:srgbClr val="1F1F1F"/>
+                </a:solidFill>
+                <a:latin typeface="Arial"/>
+              </a:rPr>
+              <a:t>A.  reliable electricity</a:t>
+            </a:r>
+          </a:p>
+          <a:p>
+            <a:pPr algn="l">
+              <a:spcAft>
+                <a:spcPts val="400"/>
+              </a:spcAft>
+            </a:pPr>
+            <a:r>
+              <a:rPr sz="2800" b="0" i="0">
+                <a:solidFill>
+                  <a:srgbClr val="1F1F1F"/>
+                </a:solidFill>
+                <a:latin typeface="Arial"/>
+              </a:rPr>
+              <a:t>B.  little air pollution</a:t>
+            </a:r>
+          </a:p>
+          <a:p>
+            <a:pPr algn="l">
+              <a:spcAft>
+                <a:spcPts val="400"/>
+              </a:spcAft>
+            </a:pPr>
+            <a:r>
+              <a:rPr sz="2800" b="0" i="0">
+                <a:solidFill>
+                  <a:srgbClr val="1F1F1F"/>
+                </a:solidFill>
+                <a:latin typeface="Arial"/>
+              </a:rPr>
+              <a:t>C.  used fuel stays dangerous a long time</a:t>
+            </a:r>
+          </a:p>
+          <a:p>
+            <a:pPr algn="l">
+              <a:spcAft>
+                <a:spcPts val="400"/>
+              </a:spcAft>
+            </a:pPr>
+            <a:r>
+              <a:rPr sz="2800" b="0" i="0">
+                <a:solidFill>
+                  <a:srgbClr val="1F1F1F"/>
+                </a:solidFill>
+                <a:latin typeface="Arial"/>
+              </a:rPr>
+              <a:t>D.  it heats homes</a:t>
             </a:r>
           </a:p>
         </p:txBody>
@@ -5210,7 +5732,7 @@
             <a:avLst/>
           </a:prstGeom>
           <a:solidFill>
-            <a:srgbClr val="2F3C7E"/>
+            <a:srgbClr val="3E7A4E"/>
           </a:solidFill>
           <a:ln>
             <a:noFill/>
@@ -5273,7 +5795,7 @@
                 </a:solidFill>
                 <a:latin typeface="Arial"/>
               </a:rPr>
-              <a:t>Review</a:t>
+              <a:t>Answer</a:t>
             </a:r>
           </a:p>
         </p:txBody>
@@ -5308,11 +5830,11 @@
             <a:r>
               <a:rPr sz="1400" b="0" i="0">
                 <a:solidFill>
-                  <a:srgbClr val="C9D2E8"/>
-                </a:solidFill>
-                <a:latin typeface="Arial"/>
-              </a:rPr>
-              <a:t>17</a:t>
+                  <a:srgbClr val="FFFFFF"/>
+                </a:solidFill>
+                <a:latin typeface="Arial"/>
+              </a:rPr>
+              <a:t>16</a:t>
             </a:r>
           </a:p>
         </p:txBody>
@@ -5325,8 +5847,8 @@
         </p:nvSpPr>
         <p:spPr>
           <a:xfrm>
-            <a:off x="822960" y="1463040"/>
-            <a:ext cx="10515600" cy="1188720"/>
+            <a:off x="822960" y="1645920"/>
+            <a:ext cx="10515600" cy="1828800"/>
           </a:xfrm>
           <a:prstGeom prst="rect">
             <a:avLst/>
@@ -5351,94 +5873,7 @@
                 </a:solidFill>
                 <a:latin typeface="Arial"/>
               </a:rPr>
-              <a:t>The mechanism of nuclear fission (splitting atoms) is —</a:t>
-            </a:r>
-          </a:p>
-        </p:txBody>
-      </p:sp>
-      <p:sp>
-        <p:nvSpPr>
-          <p:cNvPr id="7" name="TextBox 6"/>
-          <p:cNvSpPr txBox="1"/>
-          <p:nvPr/>
-        </p:nvSpPr>
-        <p:spPr>
-          <a:xfrm>
-            <a:off x="822960" y="2834640"/>
-            <a:ext cx="10515600" cy="3108960"/>
-          </a:xfrm>
-          <a:prstGeom prst="rect">
-            <a:avLst/>
-          </a:prstGeom>
-          <a:noFill/>
-        </p:spPr>
-        <p:txBody>
-          <a:bodyPr wrap="square" anchor="t">
-            <a:spAutoFit/>
-          </a:bodyPr>
-          <a:lstStyle/>
-          <a:p>
-            <a:pPr algn="l">
-              <a:spcAft>
-                <a:spcPts val="400"/>
-              </a:spcAft>
-            </a:pPr>
-            <a:r>
-              <a:rPr sz="2800" b="0" i="0">
-                <a:solidFill>
-                  <a:srgbClr val="1F1F1F"/>
-                </a:solidFill>
-                <a:latin typeface="Arial"/>
-              </a:rPr>
-              <a:t>A.  the main learning goal</a:t>
-            </a:r>
-          </a:p>
-          <a:p>
-            <a:pPr algn="l">
-              <a:spcAft>
-                <a:spcPts val="400"/>
-              </a:spcAft>
-            </a:pPr>
-            <a:r>
-              <a:rPr sz="2800" b="0" i="0">
-                <a:solidFill>
-                  <a:srgbClr val="1F1F1F"/>
-                </a:solidFill>
-                <a:latin typeface="Arial"/>
-              </a:rPr>
-              <a:t>B.  NOT a required learning objective</a:t>
-            </a:r>
-          </a:p>
-          <a:p>
-            <a:pPr algn="l">
-              <a:spcAft>
-                <a:spcPts val="400"/>
-              </a:spcAft>
-            </a:pPr>
-            <a:r>
-              <a:rPr sz="2800" b="0" i="0">
-                <a:solidFill>
-                  <a:srgbClr val="1F1F1F"/>
-                </a:solidFill>
-                <a:latin typeface="Arial"/>
-              </a:rPr>
-              <a:t>C.  the only thing to memorize</a:t>
-            </a:r>
-          </a:p>
-          <a:p>
-            <a:pPr algn="l">
-              <a:spcAft>
-                <a:spcPts val="400"/>
-              </a:spcAft>
-            </a:pPr>
-            <a:r>
-              <a:rPr sz="2800" b="0" i="0">
-                <a:solidFill>
-                  <a:srgbClr val="1F1F1F"/>
-                </a:solidFill>
-                <a:latin typeface="Arial"/>
-              </a:rPr>
-              <a:t>D.  how solar cells work</a:t>
+              <a:t>C. Used fuel must be stored safely for a very long time.</a:t>
             </a:r>
           </a:p>
         </p:txBody>
@@ -5520,7 +5955,7 @@
             <a:avLst/>
           </a:prstGeom>
           <a:solidFill>
-            <a:srgbClr val="3E7A4E"/>
+            <a:srgbClr val="2F3C7E"/>
           </a:solidFill>
           <a:ln>
             <a:noFill/>
@@ -5583,7 +6018,7 @@
                 </a:solidFill>
                 <a:latin typeface="Arial"/>
               </a:rPr>
-              <a:t>Answer</a:t>
+              <a:t>Review</a:t>
             </a:r>
           </a:p>
         </p:txBody>
@@ -5618,11 +6053,11 @@
             <a:r>
               <a:rPr sz="1400" b="0" i="0">
                 <a:solidFill>
-                  <a:srgbClr val="FFFFFF"/>
-                </a:solidFill>
-                <a:latin typeface="Arial"/>
-              </a:rPr>
-              <a:t>18</a:t>
+                  <a:srgbClr val="C9D2E8"/>
+                </a:solidFill>
+                <a:latin typeface="Arial"/>
+              </a:rPr>
+              <a:t>17</a:t>
             </a:r>
           </a:p>
         </p:txBody>
@@ -5635,8 +6070,8 @@
         </p:nvSpPr>
         <p:spPr>
           <a:xfrm>
-            <a:off x="822960" y="1645920"/>
-            <a:ext cx="10515600" cy="1828800"/>
+            <a:off x="822960" y="1463040"/>
+            <a:ext cx="10515600" cy="1188720"/>
           </a:xfrm>
           <a:prstGeom prst="rect">
             <a:avLst/>
@@ -5661,7 +6096,94 @@
                 </a:solidFill>
                 <a:latin typeface="Arial"/>
               </a:rPr>
-              <a:t>B. We learn heat → steam → turbine → generator, not fission detail.</a:t>
+              <a:t>For nuclear energy, which pathway do we learn?</a:t>
+            </a:r>
+          </a:p>
+        </p:txBody>
+      </p:sp>
+      <p:sp>
+        <p:nvSpPr>
+          <p:cNvPr id="7" name="TextBox 6"/>
+          <p:cNvSpPr txBox="1"/>
+          <p:nvPr/>
+        </p:nvSpPr>
+        <p:spPr>
+          <a:xfrm>
+            <a:off x="822960" y="2834640"/>
+            <a:ext cx="10515600" cy="3108960"/>
+          </a:xfrm>
+          <a:prstGeom prst="rect">
+            <a:avLst/>
+          </a:prstGeom>
+          <a:noFill/>
+        </p:spPr>
+        <p:txBody>
+          <a:bodyPr wrap="square" anchor="t">
+            <a:spAutoFit/>
+          </a:bodyPr>
+          <a:lstStyle/>
+          <a:p>
+            <a:pPr algn="l">
+              <a:spcAft>
+                <a:spcPts val="400"/>
+              </a:spcAft>
+            </a:pPr>
+            <a:r>
+              <a:rPr sz="2800" b="0" i="0">
+                <a:solidFill>
+                  <a:srgbClr val="1F1F1F"/>
+                </a:solidFill>
+                <a:latin typeface="Arial"/>
+              </a:rPr>
+              <a:t>A.  uranium → solar cell → electricity</a:t>
+            </a:r>
+          </a:p>
+          <a:p>
+            <a:pPr algn="l">
+              <a:spcAft>
+                <a:spcPts val="400"/>
+              </a:spcAft>
+            </a:pPr>
+            <a:r>
+              <a:rPr sz="2800" b="0" i="0">
+                <a:solidFill>
+                  <a:srgbClr val="1F1F1F"/>
+                </a:solidFill>
+                <a:latin typeface="Arial"/>
+              </a:rPr>
+              <a:t>B.  uranium → heat → steam → turbine → generator</a:t>
+            </a:r>
+          </a:p>
+          <a:p>
+            <a:pPr algn="l">
+              <a:spcAft>
+                <a:spcPts val="400"/>
+              </a:spcAft>
+            </a:pPr>
+            <a:r>
+              <a:rPr sz="2800" b="0" i="0">
+                <a:solidFill>
+                  <a:srgbClr val="1F1F1F"/>
+                </a:solidFill>
+                <a:latin typeface="Arial"/>
+              </a:rPr>
+              <a:t>C.  uranium → battery → light</a:t>
+            </a:r>
+          </a:p>
+          <a:p>
+            <a:pPr algn="l">
+              <a:spcAft>
+                <a:spcPts val="400"/>
+              </a:spcAft>
+            </a:pPr>
+            <a:r>
+              <a:rPr sz="2800" b="0" i="0">
+                <a:solidFill>
+                  <a:srgbClr val="1F1F1F"/>
+                </a:solidFill>
+                <a:latin typeface="Arial"/>
+              </a:rPr>
+              <a:t>D.  uranium → wind → generator</a:t>
             </a:r>
           </a:p>
         </p:txBody>
@@ -5675,7 +6197,7 @@
 </file>
 
 <file path=ppt/slides/slide19.xml><?xml version="1.0" encoding="utf-8"?>
-<p:sld xmlns:a="http://schemas.openxmlformats.org/drawingml/2006/main" xmlns:r="http://schemas.openxmlformats.org/officeDocument/2006/relationships" xmlns:p="http://schemas.openxmlformats.org/presentationml/2006/main">
+<p:sld xmlns:a="http://schemas.openxmlformats.org/drawingml/2006/main" xmlns:p="http://schemas.openxmlformats.org/presentationml/2006/main" xmlns:r="http://schemas.openxmlformats.org/officeDocument/2006/relationships">
   <p:cSld>
     <p:spTree>
       <p:nvGrpSpPr>
@@ -5737,13 +6259,13 @@
         <p:spPr>
           <a:xfrm>
             <a:off x="0" y="0"/>
-            <a:ext cx="12191695" cy="1417320"/>
+            <a:ext cx="12191695" cy="822960"/>
           </a:xfrm>
           <a:prstGeom prst="rect">
             <a:avLst/>
           </a:prstGeom>
           <a:solidFill>
-            <a:srgbClr val="2F3C7E"/>
+            <a:srgbClr val="3E7A4E"/>
           </a:solidFill>
           <a:ln>
             <a:noFill/>
@@ -5780,8 +6302,8 @@
         </p:nvSpPr>
         <p:spPr>
           <a:xfrm>
-            <a:off x="457200" y="109728"/>
-            <a:ext cx="10424160" cy="868680"/>
+            <a:off x="457200" y="146304"/>
+            <a:ext cx="10515600" cy="548640"/>
           </a:xfrm>
           <a:prstGeom prst="rect">
             <a:avLst/>
@@ -5800,13 +6322,13 @@
               </a:spcAft>
             </a:pPr>
             <a:r>
-              <a:rPr sz="3200" b="1">
+              <a:rPr sz="2400" b="1" i="0">
                 <a:solidFill>
                   <a:srgbClr val="FFFFFF"/>
                 </a:solidFill>
                 <a:latin typeface="Arial"/>
               </a:rPr>
-              <a:t>Coal vs Nuclear — Same Pathway, Different Heat Source</a:t>
+              <a:t>Answer</a:t>
             </a:r>
           </a:p>
         </p:txBody>
@@ -5819,8 +6341,8 @@
         </p:nvSpPr>
         <p:spPr>
           <a:xfrm>
-            <a:off x="457200" y="1024128"/>
-            <a:ext cx="10424160" cy="329184"/>
+            <a:off x="10424160" y="256032"/>
+            <a:ext cx="731520" cy="365760"/>
           </a:xfrm>
           <a:prstGeom prst="rect">
             <a:avLst/>
@@ -5828,7 +6350,46 @@
           <a:noFill/>
         </p:spPr>
         <p:txBody>
-          <a:bodyPr wrap="square" anchor="ctr">
+          <a:bodyPr wrap="square" anchor="t">
+            <a:spAutoFit/>
+          </a:bodyPr>
+          <a:lstStyle/>
+          <a:p>
+            <a:pPr algn="r">
+              <a:spcAft>
+                <a:spcPts val="400"/>
+              </a:spcAft>
+            </a:pPr>
+            <a:r>
+              <a:rPr sz="1400" b="0" i="0">
+                <a:solidFill>
+                  <a:srgbClr val="FFFFFF"/>
+                </a:solidFill>
+                <a:latin typeface="Arial"/>
+              </a:rPr>
+              <a:t>18</a:t>
+            </a:r>
+          </a:p>
+        </p:txBody>
+      </p:sp>
+      <p:sp>
+        <p:nvSpPr>
+          <p:cNvPr id="6" name="TextBox 5"/>
+          <p:cNvSpPr txBox="1"/>
+          <p:nvPr/>
+        </p:nvSpPr>
+        <p:spPr>
+          <a:xfrm>
+            <a:off x="822960" y="1645920"/>
+            <a:ext cx="10515600" cy="1828800"/>
+          </a:xfrm>
+          <a:prstGeom prst="rect">
+            <a:avLst/>
+          </a:prstGeom>
+          <a:noFill/>
+        </p:spPr>
+        <p:txBody>
+          <a:bodyPr wrap="square" anchor="t">
             <a:spAutoFit/>
           </a:bodyPr>
           <a:lstStyle/>
@@ -5839,192 +6400,13 @@
               </a:spcAft>
             </a:pPr>
             <a:r>
-              <a:rPr sz="1500" b="0">
-                <a:solidFill>
-                  <a:srgbClr val="C9D2E8"/>
-                </a:solidFill>
-                <a:latin typeface="Arial"/>
-              </a:rPr>
-              <a:t>Media placeholder · optional video · pending generation</a:t>
-            </a:r>
-          </a:p>
-        </p:txBody>
-      </p:sp>
-      <p:sp>
-        <p:nvSpPr>
-          <p:cNvPr id="6" name="TextBox 5"/>
-          <p:cNvSpPr txBox="1"/>
-          <p:nvPr/>
-        </p:nvSpPr>
-        <p:spPr>
-          <a:xfrm>
-            <a:off x="10607040" y="310896"/>
-            <a:ext cx="731520" cy="365760"/>
-          </a:xfrm>
-          <a:prstGeom prst="rect">
-            <a:avLst/>
-          </a:prstGeom>
-          <a:noFill/>
-        </p:spPr>
-        <p:txBody>
-          <a:bodyPr wrap="square" anchor="ctr">
-            <a:spAutoFit/>
-          </a:bodyPr>
-          <a:lstStyle/>
-          <a:p>
-            <a:pPr algn="r">
-              <a:spcAft>
-                <a:spcPts val="400"/>
-              </a:spcAft>
-            </a:pPr>
-            <a:r>
-              <a:rPr sz="1500" b="0">
-                <a:solidFill>
-                  <a:srgbClr val="C9D2E8"/>
-                </a:solidFill>
-                <a:latin typeface="Arial"/>
-              </a:rPr>
-              <a:t>6</a:t>
-            </a:r>
-          </a:p>
-        </p:txBody>
-      </p:sp>
-      <p:sp>
-        <p:nvSpPr>
-          <p:cNvPr id="7" name="Rounded Rectangle 6"/>
-          <p:cNvSpPr/>
-          <p:nvPr/>
-        </p:nvSpPr>
-        <p:spPr>
-          <a:xfrm>
-            <a:off x="10972800" y="256032"/>
-            <a:ext cx="1051560" cy="420624"/>
-          </a:xfrm>
-          <a:prstGeom prst="roundRect">
-            <a:avLst/>
-          </a:prstGeom>
-          <a:solidFill>
-            <a:srgbClr val="2F3C7E"/>
-          </a:solidFill>
-          <a:ln>
-            <a:noFill/>
-          </a:ln>
-          <a:effectLst/>
-        </p:spPr>
-        <p:style>
-          <a:lnRef idx="1">
-            <a:schemeClr val="accent1"/>
-          </a:lnRef>
-          <a:fillRef idx="3">
-            <a:schemeClr val="accent1"/>
-          </a:fillRef>
-          <a:effectRef idx="2">
-            <a:schemeClr val="accent1"/>
-          </a:effectRef>
-          <a:fontRef idx="minor">
-            <a:schemeClr val="lt1"/>
-          </a:fontRef>
-        </p:style>
-        <p:txBody>
-          <a:bodyPr rtlCol="0" anchor="ctr" wrap="none"/>
-          <a:lstStyle/>
-          <a:p>
-            <a:pPr algn="ctr"/>
-            <a:r>
-              <a:rPr sz="1100" b="1">
-                <a:solidFill>
-                  <a:srgbClr val="FFFFFF"/>
-                </a:solidFill>
-                <a:latin typeface="Arial"/>
-              </a:rPr>
-              <a:t>PLACEHOLDER</a:t>
-            </a:r>
-          </a:p>
-        </p:txBody>
-      </p:sp>
-      <p:sp>
-        <p:nvSpPr>
-          <p:cNvPr id="8" name="TextBox 7"/>
-          <p:cNvSpPr txBox="1"/>
-          <p:nvPr/>
-        </p:nvSpPr>
-        <p:spPr>
-          <a:xfrm>
-            <a:off x="822960" y="1700000"/>
-            <a:ext cx="10515600" cy="4400000"/>
-          </a:xfrm>
-          <a:prstGeom prst="rect">
-            <a:avLst/>
-          </a:prstGeom>
-          <a:noFill/>
-        </p:spPr>
-        <p:txBody>
-          <a:bodyPr wrap="square">
-            <a:spAutoFit/>
-          </a:bodyPr>
-          <a:lstStyle/>
-          <a:p>
-            <a:pPr>
-              <a:spcAft>
-                <a:spcPts val="1000"/>
-              </a:spcAft>
-            </a:pPr>
-            <a:r>
-              <a:rPr sz="2000" b="1">
+              <a:rPr sz="3000" b="1" i="0">
                 <a:solidFill>
                   <a:srgbClr val="1F1F1F"/>
                 </a:solidFill>
                 <a:latin typeface="Arial"/>
               </a:rPr>
-              <a:t>Intended: ~90-second SAME / DIFFERENT comparison clip (Week 6 Thursday).</a:t>
-            </a:r>
-          </a:p>
-          <a:p>
-            <a:pPr>
-              <a:spcAft>
-                <a:spcPts val="1000"/>
-              </a:spcAft>
-            </a:pPr>
-            <a:r>
-              <a:rPr sz="2000" b="0">
-                <a:solidFill>
-                  <a:srgbClr val="1F1F1F"/>
-                </a:solidFill>
-                <a:latin typeface="Arial"/>
-              </a:rPr>
-              <a:t>Script ready: production/media/scripts/unit-02/04-coal-vs-nuclear-final-script.md</a:t>
-            </a:r>
-          </a:p>
-          <a:p>
-            <a:pPr>
-              <a:spcAft>
-                <a:spcPts val="1000"/>
-              </a:spcAft>
-            </a:pPr>
-            <a:r>
-              <a:rPr sz="2000" b="0">
-                <a:solidFill>
-                  <a:srgbClr val="1F1F1F"/>
-                </a:solidFill>
-                <a:latin typeface="Arial"/>
-              </a:rPr>
-              <a:t>Covers: heat → steam → turbine → generator (SAME); heat source (DIFFERENT).</a:t>
-            </a:r>
-          </a:p>
-          <a:p>
-            <a:pPr>
-              <a:spcAft>
-                <a:spcPts val="1000"/>
-              </a:spcAft>
-            </a:pPr>
-            <a:r>
-              <a:rPr sz="2000" b="0">
-                <a:solidFill>
-                  <a:srgbClr val="1F1F1F"/>
-                </a:solidFill>
-                <a:latin typeface="Arial"/>
-              </a:rPr>
-              <a:t>This slide is a drop-in slot — the deck teaches fully without the video.</a:t>
+              <a:t>B. uranium → heat → steam → turbine → generator</a:t>
             </a:r>
           </a:p>
         </p:txBody>
@@ -7222,7 +7604,7 @@
 </file>
 
 <file path=ppt/slides/slide6.xml><?xml version="1.0" encoding="utf-8"?>
-<p:sld xmlns:a="http://schemas.openxmlformats.org/drawingml/2006/main" xmlns:p="http://schemas.openxmlformats.org/presentationml/2006/main" xmlns:r="http://schemas.openxmlformats.org/officeDocument/2006/relationships">
+<p:sld xmlns:a="http://schemas.openxmlformats.org/drawingml/2006/main" xmlns:r="http://schemas.openxmlformats.org/officeDocument/2006/relationships" xmlns:p="http://schemas.openxmlformats.org/presentationml/2006/main">
   <p:cSld>
     <p:spTree>
       <p:nvGrpSpPr>
@@ -7347,13 +7729,13 @@
               </a:spcAft>
             </a:pPr>
             <a:r>
-              <a:rPr sz="3800" b="1" i="0">
+              <a:rPr sz="3200" b="1">
                 <a:solidFill>
                   <a:srgbClr val="FFFFFF"/>
                 </a:solidFill>
                 <a:latin typeface="Arial"/>
               </a:rPr>
-              <a:t>Electricity Pathway</a:t>
+              <a:t>Coal vs Nuclear — Same Pathway, Different Heat Source</a:t>
             </a:r>
           </a:p>
         </p:txBody>
@@ -7375,7 +7757,7 @@
           <a:noFill/>
         </p:spPr>
         <p:txBody>
-          <a:bodyPr wrap="square" anchor="t">
+          <a:bodyPr wrap="square" anchor="ctr">
             <a:spAutoFit/>
           </a:bodyPr>
           <a:lstStyle/>
@@ -7386,13 +7768,13 @@
               </a:spcAft>
             </a:pPr>
             <a:r>
-              <a:rPr sz="1500" b="0" i="0">
+              <a:rPr sz="1500" b="0">
                 <a:solidFill>
                   <a:srgbClr val="C9D2E8"/>
                 </a:solidFill>
                 <a:latin typeface="Arial"/>
               </a:rPr>
-              <a:t>Page 1 · Electricity Pathway</a:t>
+              <a:t>Optional video · Week 6 Thursday</a:t>
             </a:r>
           </a:p>
         </p:txBody>
@@ -7414,7 +7796,7 @@
           <a:noFill/>
         </p:spPr>
         <p:txBody>
-          <a:bodyPr wrap="square" anchor="t">
+          <a:bodyPr wrap="square" anchor="ctr">
             <a:spAutoFit/>
           </a:bodyPr>
           <a:lstStyle/>
@@ -7425,7 +7807,7 @@
               </a:spcAft>
             </a:pPr>
             <a:r>
-              <a:rPr sz="1500" b="0" i="0">
+              <a:rPr sz="1500" b="0">
                 <a:solidFill>
                   <a:srgbClr val="C9D2E8"/>
                 </a:solidFill>
@@ -7473,7 +7855,7 @@
           </a:fontRef>
         </p:style>
         <p:txBody>
-          <a:bodyPr rtlCol="0" anchor="ctr" wrap="none"/>
+          <a:bodyPr rtlCol="0" anchor="ctr" wrap="square"/>
           <a:lstStyle/>
           <a:p>
             <a:pPr algn="ctr"/>
@@ -7484,7 +7866,7 @@
                 </a:solidFill>
                 <a:latin typeface="Arial"/>
               </a:rPr>
-              <a:t>NOTE</a:t>
+              <a:t>WATCH</a:t>
             </a:r>
           </a:p>
         </p:txBody>
@@ -7497,47 +7879,8 @@
         </p:nvSpPr>
         <p:spPr>
           <a:xfrm>
-            <a:off x="457200" y="1517904"/>
-            <a:ext cx="10789920" cy="365760"/>
-          </a:xfrm>
-          <a:prstGeom prst="rect">
-            <a:avLst/>
-          </a:prstGeom>
-          <a:noFill/>
-        </p:spPr>
-        <p:txBody>
-          <a:bodyPr wrap="square" anchor="t">
-            <a:spAutoFit/>
-          </a:bodyPr>
-          <a:lstStyle/>
-          <a:p>
-            <a:pPr algn="l">
-              <a:spcAft>
-                <a:spcPts val="400"/>
-              </a:spcAft>
-            </a:pPr>
-            <a:r>
-              <a:rPr sz="1400" b="0" i="1">
-                <a:solidFill>
-                  <a:srgbClr val="C03D3D"/>
-                </a:solidFill>
-                <a:latin typeface="Arial"/>
-              </a:rPr>
-              <a:t>Reveal after students try.</a:t>
-            </a:r>
-          </a:p>
-        </p:txBody>
-      </p:sp>
-      <p:sp>
-        <p:nvSpPr>
-          <p:cNvPr id="9" name="TextBox 8"/>
-          <p:cNvSpPr txBox="1"/>
-          <p:nvPr/>
-        </p:nvSpPr>
-        <p:spPr>
-          <a:xfrm>
-            <a:off x="822960" y="2011680"/>
-            <a:ext cx="10515600" cy="3017520"/>
+            <a:off x="457200" y="6500000"/>
+            <a:ext cx="11277295" cy="300000"/>
           </a:xfrm>
           <a:prstGeom prst="rect">
             <a:avLst/>
@@ -7550,35 +7893,75 @@
           </a:bodyPr>
           <a:lstStyle/>
           <a:p>
-            <a:pPr>
-              <a:spcAft>
-                <a:spcPts val="1000"/>
-              </a:spcAft>
-            </a:pPr>
-            <a:r>
-              <a:rPr sz="3200">
-                <a:solidFill>
-                  <a:srgbClr val="1F1F1F"/>
-                </a:solidFill>
-                <a:latin typeface="Arial"/>
-              </a:rPr>
-              <a:t>Copy the pathway.</a:t>
-            </a:r>
-          </a:p>
-        </p:txBody>
-      </p:sp>
-      <p:sp>
-        <p:nvSpPr>
-          <p:cNvPr id="10" name="Rounded Rectangle 9"/>
+            <a:pPr algn="ctr"/>
+            <a:r>
+              <a:rPr sz="1800" b="1">
+                <a:solidFill>
+                  <a:srgbClr val="2F3C7E"/>
+                </a:solidFill>
+                <a:latin typeface="Arial"/>
+              </a:rPr>
+              <a:t>THINK: What is the SAME? What is DIFFERENT?</a:t>
+            </a:r>
+          </a:p>
+        </p:txBody>
+      </p:sp>
+      <p:sp>
+        <p:nvSpPr>
+          <p:cNvPr id="9" name="Rounded Rectangle 8"/>
           <p:cNvSpPr/>
           <p:nvPr/>
         </p:nvSpPr>
         <p:spPr>
           <a:xfrm>
-            <a:off x="822960" y="5120640"/>
-            <a:ext cx="10515600" cy="868680"/>
+            <a:off x="1895847" y="1720000"/>
+            <a:ext cx="8400000" cy="4725000"/>
           </a:xfrm>
           <a:prstGeom prst="roundRect">
+            <a:avLst/>
+          </a:prstGeom>
+          <a:solidFill>
+            <a:srgbClr val="E8ECF6"/>
+          </a:solidFill>
+          <a:ln>
+            <a:noFill/>
+          </a:ln>
+          <a:effectLst/>
+        </p:spPr>
+        <p:style>
+          <a:lnRef idx="1">
+            <a:schemeClr val="accent1"/>
+          </a:lnRef>
+          <a:fillRef idx="3">
+            <a:schemeClr val="accent1"/>
+          </a:fillRef>
+          <a:effectRef idx="2">
+            <a:schemeClr val="accent1"/>
+          </a:effectRef>
+          <a:fontRef idx="minor">
+            <a:schemeClr val="lt1"/>
+          </a:fontRef>
+        </p:style>
+        <p:txBody>
+          <a:bodyPr rtlCol="0" anchor="ctr"/>
+          <a:lstStyle/>
+          <a:p>
+            <a:pPr algn="ctr"/>
+          </a:p>
+        </p:txBody>
+      </p:sp>
+      <p:sp>
+        <p:nvSpPr>
+          <p:cNvPr id="10" name="Oval 9"/>
+          <p:cNvSpPr/>
+          <p:nvPr/>
+        </p:nvSpPr>
+        <p:spPr>
+          <a:xfrm>
+            <a:off x="5410047" y="3396700"/>
+            <a:ext cx="1371600" cy="1371600"/>
+          </a:xfrm>
+          <a:prstGeom prst="ellipse">
             <a:avLst/>
           </a:prstGeom>
           <a:solidFill>
@@ -7604,91 +7987,54 @@
           </a:fontRef>
         </p:style>
         <p:txBody>
-          <a:bodyPr rtlCol="0" anchor="ctr" wrap="square" lIns="127000" rIns="127000"/>
+          <a:bodyPr rtlCol="0" anchor="ctr"/>
           <a:lstStyle/>
           <a:p>
             <a:pPr algn="ctr"/>
-            <a:r>
-              <a:rPr sz="2600" b="1">
-                <a:solidFill>
-                  <a:srgbClr val="E8C54A"/>
-                </a:solidFill>
-                <a:latin typeface="Arial"/>
-              </a:rPr>
-              <a:t>NUCLEAR HEAT</a:t>
-            </a:r>
-            <a:r>
-              <a:rPr sz="2600" b="1">
-                <a:solidFill>
-                  <a:srgbClr val="C03D3D"/>
-                </a:solidFill>
-                <a:latin typeface="Arial"/>
-              </a:rPr>
-              <a:t> → </a:t>
-            </a:r>
-            <a:r>
-              <a:rPr sz="2600" b="1">
-                <a:solidFill>
-                  <a:srgbClr val="FFFFFF"/>
-                </a:solidFill>
-                <a:latin typeface="Arial"/>
-              </a:rPr>
-              <a:t>STEAM</a:t>
-            </a:r>
-            <a:r>
-              <a:rPr sz="2600" b="1">
-                <a:solidFill>
-                  <a:srgbClr val="C03D3D"/>
-                </a:solidFill>
-                <a:latin typeface="Arial"/>
-              </a:rPr>
-              <a:t> → </a:t>
-            </a:r>
-            <a:r>
-              <a:rPr sz="2600" b="1">
-                <a:solidFill>
-                  <a:srgbClr val="FFFFFF"/>
-                </a:solidFill>
-                <a:latin typeface="Arial"/>
-              </a:rPr>
-              <a:t>TURBINE</a:t>
-            </a:r>
-            <a:r>
-              <a:rPr sz="2600" b="1">
-                <a:solidFill>
-                  <a:srgbClr val="C03D3D"/>
-                </a:solidFill>
-                <a:latin typeface="Arial"/>
-              </a:rPr>
-              <a:t> → </a:t>
-            </a:r>
-            <a:r>
-              <a:rPr sz="2600" b="1">
-                <a:solidFill>
-                  <a:srgbClr val="FFFFFF"/>
-                </a:solidFill>
-                <a:latin typeface="Arial"/>
-              </a:rPr>
-              <a:t>GENERATOR</a:t>
-            </a:r>
-            <a:r>
-              <a:rPr sz="2600" b="1">
-                <a:solidFill>
-                  <a:srgbClr val="C03D3D"/>
-                </a:solidFill>
-                <a:latin typeface="Arial"/>
-              </a:rPr>
-              <a:t> → </a:t>
-            </a:r>
-            <a:r>
-              <a:rPr sz="2600" b="1">
-                <a:solidFill>
-                  <a:srgbClr val="FFFFFF"/>
-                </a:solidFill>
-                <a:latin typeface="Arial"/>
-              </a:rPr>
-              <a:t>ELECTRICITY</a:t>
-            </a:r>
+          </a:p>
+        </p:txBody>
+      </p:sp>
+      <p:sp>
+        <p:nvSpPr>
+          <p:cNvPr id="11" name="Isosceles Triangle 10"/>
+          <p:cNvSpPr/>
+          <p:nvPr/>
+        </p:nvSpPr>
+        <p:spPr>
+          <a:xfrm rot="5400000">
+            <a:off x="5821527" y="3808180"/>
+            <a:ext cx="548640" cy="548640"/>
+          </a:xfrm>
+          <a:prstGeom prst="triangle">
+            <a:avLst/>
+          </a:prstGeom>
+          <a:solidFill>
+            <a:srgbClr val="FFFFFF"/>
+          </a:solidFill>
+          <a:ln>
+            <a:noFill/>
+          </a:ln>
+          <a:effectLst/>
+        </p:spPr>
+        <p:style>
+          <a:lnRef idx="1">
+            <a:schemeClr val="accent1"/>
+          </a:lnRef>
+          <a:fillRef idx="3">
+            <a:schemeClr val="accent1"/>
+          </a:fillRef>
+          <a:effectRef idx="2">
+            <a:schemeClr val="accent1"/>
+          </a:effectRef>
+          <a:fontRef idx="minor">
+            <a:schemeClr val="lt1"/>
+          </a:fontRef>
+        </p:style>
+        <p:txBody>
+          <a:bodyPr rtlCol="0" anchor="ctr"/>
+          <a:lstStyle/>
+          <a:p>
+            <a:pPr algn="ctr"/>
           </a:p>
         </p:txBody>
       </p:sp>
@@ -7832,7 +8178,7 @@
                 </a:solidFill>
                 <a:latin typeface="Arial"/>
               </a:rPr>
-              <a:t>Benefits and Limitations</a:t>
+              <a:t>Electricity Pathway</a:t>
             </a:r>
           </a:p>
         </p:txBody>
@@ -7871,7 +8217,7 @@
                 </a:solidFill>
                 <a:latin typeface="Arial"/>
               </a:rPr>
-              <a:t>Page 2 · Benefits and Limitations</a:t>
+              <a:t>Page 1 · Electricity Pathway</a:t>
             </a:r>
           </a:p>
         </p:txBody>
@@ -7910,7 +8256,7 @@
                 </a:solidFill>
                 <a:latin typeface="Arial"/>
               </a:rPr>
-              <a:t>7</a:t>
+              <a:t>6</a:t>
             </a:r>
           </a:p>
         </p:txBody>
@@ -7976,7 +8322,46 @@
         </p:nvSpPr>
         <p:spPr>
           <a:xfrm>
-            <a:off x="822960" y="1645920"/>
+            <a:off x="457200" y="1517904"/>
+            <a:ext cx="10789920" cy="365760"/>
+          </a:xfrm>
+          <a:prstGeom prst="rect">
+            <a:avLst/>
+          </a:prstGeom>
+          <a:noFill/>
+        </p:spPr>
+        <p:txBody>
+          <a:bodyPr wrap="square" anchor="t">
+            <a:spAutoFit/>
+          </a:bodyPr>
+          <a:lstStyle/>
+          <a:p>
+            <a:pPr algn="l">
+              <a:spcAft>
+                <a:spcPts val="400"/>
+              </a:spcAft>
+            </a:pPr>
+            <a:r>
+              <a:rPr sz="1400" b="0" i="1">
+                <a:solidFill>
+                  <a:srgbClr val="C03D3D"/>
+                </a:solidFill>
+                <a:latin typeface="Arial"/>
+              </a:rPr>
+              <a:t>Reveal after students try.</a:t>
+            </a:r>
+          </a:p>
+        </p:txBody>
+      </p:sp>
+      <p:sp>
+        <p:nvSpPr>
+          <p:cNvPr id="9" name="TextBox 8"/>
+          <p:cNvSpPr txBox="1"/>
+          <p:nvPr/>
+        </p:nvSpPr>
+        <p:spPr>
+          <a:xfrm>
+            <a:off x="822960" y="2011680"/>
             <a:ext cx="10515600" cy="3017520"/>
           </a:xfrm>
           <a:prstGeom prst="rect">
@@ -8002,23 +8387,132 @@
                 </a:solidFill>
                 <a:latin typeface="Arial"/>
               </a:rPr>
-              <a:t>Benefits: reliable, little air pollution.</a:t>
-            </a:r>
-          </a:p>
-          <a:p>
-            <a:pPr>
-              <a:spcAft>
-                <a:spcPts val="1000"/>
-              </a:spcAft>
-            </a:pPr>
-            <a:r>
-              <a:rPr sz="3200">
-                <a:solidFill>
-                  <a:srgbClr val="1F1F1F"/>
-                </a:solidFill>
-                <a:latin typeface="Arial"/>
-              </a:rPr>
-              <a:t>Limitations: nonrenewable, used fuel must be stored safely.</a:t>
+              <a:t>Copy the pathway.</a:t>
+            </a:r>
+          </a:p>
+        </p:txBody>
+      </p:sp>
+      <p:sp>
+        <p:nvSpPr>
+          <p:cNvPr id="10" name="Rounded Rectangle 9"/>
+          <p:cNvSpPr/>
+          <p:nvPr/>
+        </p:nvSpPr>
+        <p:spPr>
+          <a:xfrm>
+            <a:off x="822960" y="5120640"/>
+            <a:ext cx="10515600" cy="868680"/>
+          </a:xfrm>
+          <a:prstGeom prst="roundRect">
+            <a:avLst/>
+          </a:prstGeom>
+          <a:solidFill>
+            <a:srgbClr val="2F3C7E"/>
+          </a:solidFill>
+          <a:ln>
+            <a:noFill/>
+          </a:ln>
+          <a:effectLst/>
+        </p:spPr>
+        <p:style>
+          <a:lnRef idx="1">
+            <a:schemeClr val="accent1"/>
+          </a:lnRef>
+          <a:fillRef idx="3">
+            <a:schemeClr val="accent1"/>
+          </a:fillRef>
+          <a:effectRef idx="2">
+            <a:schemeClr val="accent1"/>
+          </a:effectRef>
+          <a:fontRef idx="minor">
+            <a:schemeClr val="lt1"/>
+          </a:fontRef>
+        </p:style>
+        <p:txBody>
+          <a:bodyPr rtlCol="0" anchor="ctr" wrap="square" lIns="127000" rIns="127000"/>
+          <a:lstStyle/>
+          <a:p>
+            <a:pPr algn="ctr"/>
+            <a:r>
+              <a:rPr sz="2600" b="1">
+                <a:solidFill>
+                  <a:srgbClr val="E8C54A"/>
+                </a:solidFill>
+                <a:latin typeface="Arial"/>
+              </a:rPr>
+              <a:t>NUCLEAR HEAT</a:t>
+            </a:r>
+            <a:r>
+              <a:rPr sz="2600" b="1">
+                <a:solidFill>
+                  <a:srgbClr val="C03D3D"/>
+                </a:solidFill>
+                <a:latin typeface="Arial"/>
+              </a:rPr>
+              <a:t> → </a:t>
+            </a:r>
+            <a:r>
+              <a:rPr sz="2600" b="1">
+                <a:solidFill>
+                  <a:srgbClr val="FFFFFF"/>
+                </a:solidFill>
+                <a:latin typeface="Arial"/>
+              </a:rPr>
+              <a:t>STEAM</a:t>
+            </a:r>
+            <a:r>
+              <a:rPr sz="2600" b="1">
+                <a:solidFill>
+                  <a:srgbClr val="C03D3D"/>
+                </a:solidFill>
+                <a:latin typeface="Arial"/>
+              </a:rPr>
+              <a:t> → </a:t>
+            </a:r>
+            <a:r>
+              <a:rPr sz="2600" b="1">
+                <a:solidFill>
+                  <a:srgbClr val="FFFFFF"/>
+                </a:solidFill>
+                <a:latin typeface="Arial"/>
+              </a:rPr>
+              <a:t>TURBINE</a:t>
+            </a:r>
+            <a:r>
+              <a:rPr sz="2600" b="1">
+                <a:solidFill>
+                  <a:srgbClr val="C03D3D"/>
+                </a:solidFill>
+                <a:latin typeface="Arial"/>
+              </a:rPr>
+              <a:t> → </a:t>
+            </a:r>
+            <a:r>
+              <a:rPr sz="2600" b="1">
+                <a:solidFill>
+                  <a:srgbClr val="FFFFFF"/>
+                </a:solidFill>
+                <a:latin typeface="Arial"/>
+              </a:rPr>
+              <a:t>GENERATOR</a:t>
+            </a:r>
+            <a:r>
+              <a:rPr sz="2600" b="1">
+                <a:solidFill>
+                  <a:srgbClr val="C03D3D"/>
+                </a:solidFill>
+                <a:latin typeface="Arial"/>
+              </a:rPr>
+              <a:t> → </a:t>
+            </a:r>
+            <a:r>
+              <a:rPr sz="2600" b="1">
+                <a:solidFill>
+                  <a:srgbClr val="FFFFFF"/>
+                </a:solidFill>
+                <a:latin typeface="Arial"/>
+              </a:rPr>
+              <a:t>ELECTRICITY</a:t>
             </a:r>
           </a:p>
         </p:txBody>
@@ -8163,7 +8657,7 @@
                 </a:solidFill>
                 <a:latin typeface="Arial"/>
               </a:rPr>
-              <a:t>Safety First</a:t>
+              <a:t>Benefits and Limitations</a:t>
             </a:r>
           </a:p>
         </p:txBody>
@@ -8202,7 +8696,7 @@
                 </a:solidFill>
                 <a:latin typeface="Arial"/>
               </a:rPr>
-              <a:t>Page 2 · Safety First</a:t>
+              <a:t>Page 2 · Benefits and Limitations</a:t>
             </a:r>
           </a:p>
         </p:txBody>
@@ -8241,7 +8735,7 @@
                 </a:solidFill>
                 <a:latin typeface="Arial"/>
               </a:rPr>
-              <a:t>8</a:t>
+              <a:t>7</a:t>
             </a:r>
           </a:p>
         </p:txBody>
@@ -8333,7 +8827,23 @@
                 </a:solidFill>
                 <a:latin typeface="Arial"/>
               </a:rPr>
-              <a:t>Heat must be controlled; used fuel is stored safely.</a:t>
+              <a:t>Benefits: reliable, little air pollution.</a:t>
+            </a:r>
+          </a:p>
+          <a:p>
+            <a:pPr>
+              <a:spcAft>
+                <a:spcPts val="1000"/>
+              </a:spcAft>
+            </a:pPr>
+            <a:r>
+              <a:rPr sz="3200">
+                <a:solidFill>
+                  <a:srgbClr val="1F1F1F"/>
+                </a:solidFill>
+                <a:latin typeface="Arial"/>
+              </a:rPr>
+              <a:t>Limitations: nonrenewable, used fuel must be stored safely.</a:t>
             </a:r>
           </a:p>
         </p:txBody>
@@ -8409,7 +8919,7 @@
         <p:spPr>
           <a:xfrm>
             <a:off x="0" y="0"/>
-            <a:ext cx="12191695" cy="822960"/>
+            <a:ext cx="12191695" cy="1417320"/>
           </a:xfrm>
           <a:prstGeom prst="rect">
             <a:avLst/>
@@ -8452,8 +8962,8 @@
         </p:nvSpPr>
         <p:spPr>
           <a:xfrm>
-            <a:off x="457200" y="146304"/>
-            <a:ext cx="10515600" cy="548640"/>
+            <a:off x="457200" y="109728"/>
+            <a:ext cx="10424160" cy="868680"/>
           </a:xfrm>
           <a:prstGeom prst="rect">
             <a:avLst/>
@@ -8472,13 +8982,13 @@
               </a:spcAft>
             </a:pPr>
             <a:r>
-              <a:rPr sz="2400" b="1" i="0">
+              <a:rPr sz="3800" b="1" i="0">
                 <a:solidFill>
                   <a:srgbClr val="FFFFFF"/>
                 </a:solidFill>
                 <a:latin typeface="Arial"/>
               </a:rPr>
-              <a:t>Review</a:t>
+              <a:t>Safety First</a:t>
             </a:r>
           </a:p>
         </p:txBody>
@@ -8491,7 +9001,46 @@
         </p:nvSpPr>
         <p:spPr>
           <a:xfrm>
-            <a:off x="10424160" y="256032"/>
+            <a:off x="457200" y="1024128"/>
+            <a:ext cx="10424160" cy="329184"/>
+          </a:xfrm>
+          <a:prstGeom prst="rect">
+            <a:avLst/>
+          </a:prstGeom>
+          <a:noFill/>
+        </p:spPr>
+        <p:txBody>
+          <a:bodyPr wrap="square" anchor="t">
+            <a:spAutoFit/>
+          </a:bodyPr>
+          <a:lstStyle/>
+          <a:p>
+            <a:pPr algn="l">
+              <a:spcAft>
+                <a:spcPts val="400"/>
+              </a:spcAft>
+            </a:pPr>
+            <a:r>
+              <a:rPr sz="1500" b="0" i="0">
+                <a:solidFill>
+                  <a:srgbClr val="C9D2E8"/>
+                </a:solidFill>
+                <a:latin typeface="Arial"/>
+              </a:rPr>
+              <a:t>Page 2 · Safety First</a:t>
+            </a:r>
+          </a:p>
+        </p:txBody>
+      </p:sp>
+      <p:sp>
+        <p:nvSpPr>
+          <p:cNvPr id="6" name="TextBox 5"/>
+          <p:cNvSpPr txBox="1"/>
+          <p:nvPr/>
+        </p:nvSpPr>
+        <p:spPr>
+          <a:xfrm>
+            <a:off x="10607040" y="310896"/>
             <a:ext cx="731520" cy="365760"/>
           </a:xfrm>
           <a:prstGeom prst="rect">
@@ -8511,27 +9060,80 @@
               </a:spcAft>
             </a:pPr>
             <a:r>
-              <a:rPr sz="1400" b="0" i="0">
+              <a:rPr sz="1500" b="0" i="0">
                 <a:solidFill>
                   <a:srgbClr val="C9D2E8"/>
                 </a:solidFill>
                 <a:latin typeface="Arial"/>
               </a:rPr>
-              <a:t>9</a:t>
-            </a:r>
-          </a:p>
-        </p:txBody>
-      </p:sp>
-      <p:sp>
-        <p:nvSpPr>
-          <p:cNvPr id="6" name="TextBox 5"/>
+              <a:t>8</a:t>
+            </a:r>
+          </a:p>
+        </p:txBody>
+      </p:sp>
+      <p:sp>
+        <p:nvSpPr>
+          <p:cNvPr id="7" name="Rounded Rectangle 6"/>
+          <p:cNvSpPr/>
+          <p:nvPr/>
+        </p:nvSpPr>
+        <p:spPr>
+          <a:xfrm>
+            <a:off x="10972800" y="256032"/>
+            <a:ext cx="1051560" cy="420624"/>
+          </a:xfrm>
+          <a:prstGeom prst="roundRect">
+            <a:avLst/>
+          </a:prstGeom>
+          <a:solidFill>
+            <a:srgbClr val="2F3C7E"/>
+          </a:solidFill>
+          <a:ln>
+            <a:noFill/>
+          </a:ln>
+          <a:effectLst/>
+        </p:spPr>
+        <p:style>
+          <a:lnRef idx="1">
+            <a:schemeClr val="accent1"/>
+          </a:lnRef>
+          <a:fillRef idx="3">
+            <a:schemeClr val="accent1"/>
+          </a:fillRef>
+          <a:effectRef idx="2">
+            <a:schemeClr val="accent1"/>
+          </a:effectRef>
+          <a:fontRef idx="minor">
+            <a:schemeClr val="lt1"/>
+          </a:fontRef>
+        </p:style>
+        <p:txBody>
+          <a:bodyPr rtlCol="0" anchor="ctr" wrap="none"/>
+          <a:lstStyle/>
+          <a:p>
+            <a:pPr algn="ctr"/>
+            <a:r>
+              <a:rPr sz="1100" b="1">
+                <a:solidFill>
+                  <a:srgbClr val="FFFFFF"/>
+                </a:solidFill>
+                <a:latin typeface="Arial"/>
+              </a:rPr>
+              <a:t>NOTE</a:t>
+            </a:r>
+          </a:p>
+        </p:txBody>
+      </p:sp>
+      <p:sp>
+        <p:nvSpPr>
+          <p:cNvPr id="8" name="TextBox 7"/>
           <p:cNvSpPr txBox="1"/>
           <p:nvPr/>
         </p:nvSpPr>
         <p:spPr>
           <a:xfrm>
-            <a:off x="822960" y="1463040"/>
-            <a:ext cx="10515600" cy="1188720"/>
+            <a:off x="822960" y="1645920"/>
+            <a:ext cx="10515600" cy="3017520"/>
           </a:xfrm>
           <a:prstGeom prst="rect">
             <a:avLst/>
@@ -8539,111 +9141,24 @@
           <a:noFill/>
         </p:spPr>
         <p:txBody>
-          <a:bodyPr wrap="square" anchor="t">
+          <a:bodyPr wrap="square">
             <a:spAutoFit/>
           </a:bodyPr>
           <a:lstStyle/>
           <a:p>
-            <a:pPr algn="l">
+            <a:pPr>
               <a:spcAft>
-                <a:spcPts val="400"/>
+                <a:spcPts val="1000"/>
               </a:spcAft>
             </a:pPr>
             <a:r>
-              <a:rPr sz="3000" b="1" i="0">
+              <a:rPr sz="3200">
                 <a:solidFill>
                   <a:srgbClr val="1F1F1F"/>
                 </a:solidFill>
                 <a:latin typeface="Arial"/>
               </a:rPr>
-              <a:t>Nuclear power plants make electricity using —</a:t>
-            </a:r>
-          </a:p>
-        </p:txBody>
-      </p:sp>
-      <p:sp>
-        <p:nvSpPr>
-          <p:cNvPr id="7" name="TextBox 6"/>
-          <p:cNvSpPr txBox="1"/>
-          <p:nvPr/>
-        </p:nvSpPr>
-        <p:spPr>
-          <a:xfrm>
-            <a:off x="822960" y="2834640"/>
-            <a:ext cx="10515600" cy="3108960"/>
-          </a:xfrm>
-          <a:prstGeom prst="rect">
-            <a:avLst/>
-          </a:prstGeom>
-          <a:noFill/>
-        </p:spPr>
-        <p:txBody>
-          <a:bodyPr wrap="square" anchor="t">
-            <a:spAutoFit/>
-          </a:bodyPr>
-          <a:lstStyle/>
-          <a:p>
-            <a:pPr algn="l">
-              <a:spcAft>
-                <a:spcPts val="400"/>
-              </a:spcAft>
-            </a:pPr>
-            <a:r>
-              <a:rPr sz="2800" b="0" i="0">
-                <a:solidFill>
-                  <a:srgbClr val="1F1F1F"/>
-                </a:solidFill>
-                <a:latin typeface="Arial"/>
-              </a:rPr>
-              <a:t>A.  wind</a:t>
-            </a:r>
-          </a:p>
-          <a:p>
-            <a:pPr algn="l">
-              <a:spcAft>
-                <a:spcPts val="400"/>
-              </a:spcAft>
-            </a:pPr>
-            <a:r>
-              <a:rPr sz="2800" b="0" i="0">
-                <a:solidFill>
-                  <a:srgbClr val="1F1F1F"/>
-                </a:solidFill>
-                <a:latin typeface="Arial"/>
-              </a:rPr>
-              <a:t>B.  heat from boiling water into steam</a:t>
-            </a:r>
-          </a:p>
-          <a:p>
-            <a:pPr algn="l">
-              <a:spcAft>
-                <a:spcPts val="400"/>
-              </a:spcAft>
-            </a:pPr>
-            <a:r>
-              <a:rPr sz="2800" b="0" i="0">
-                <a:solidFill>
-                  <a:srgbClr val="1F1F1F"/>
-                </a:solidFill>
-                <a:latin typeface="Arial"/>
-              </a:rPr>
-              <a:t>C.  sunlight</a:t>
-            </a:r>
-          </a:p>
-          <a:p>
-            <a:pPr algn="l">
-              <a:spcAft>
-                <a:spcPts val="400"/>
-              </a:spcAft>
-            </a:pPr>
-            <a:r>
-              <a:rPr sz="2800" b="0" i="0">
-                <a:solidFill>
-                  <a:srgbClr val="1F1F1F"/>
-                </a:solidFill>
-                <a:latin typeface="Arial"/>
-              </a:rPr>
-              <a:t>D.  coal</a:t>
+              <a:t>Heat must be controlled; used fuel is stored safely.</a:t>
             </a:r>
           </a:p>
         </p:txBody>
@@ -8974,4 +9489,324 @@
   </a:objectDefaults>
   <a:extraClrSchemeLst/>
 </a:theme>
+</file>
+
+<file path=ppt/theme/theme2.xml><?xml version="1.0" encoding="utf-8"?>
+<a:theme xmlns:a="http://schemas.openxmlformats.org/drawingml/2006/main" name="Office Theme">
+  <a:themeElements>
+    <a:clrScheme name="Office">
+      <a:dk1>
+        <a:sysClr val="windowText" lastClr="000000"/>
+      </a:dk1>
+      <a:lt1>
+        <a:sysClr val="window" lastClr="FFFFFF"/>
+      </a:lt1>
+      <a:dk2>
+        <a:srgbClr val="1F497D"/>
+      </a:dk2>
+      <a:lt2>
+        <a:srgbClr val="EEECE1"/>
+      </a:lt2>
+      <a:accent1>
+        <a:srgbClr val="4F81BD"/>
+      </a:accent1>
+      <a:accent2>
+        <a:srgbClr val="C0504D"/>
+      </a:accent2>
+      <a:accent3>
+        <a:srgbClr val="9BBB59"/>
+      </a:accent3>
+      <a:accent4>
+        <a:srgbClr val="8064A2"/>
+      </a:accent4>
+      <a:accent5>
+        <a:srgbClr val="4BACC6"/>
+      </a:accent5>
+      <a:accent6>
+        <a:srgbClr val="F79646"/>
+      </a:accent6>
+      <a:hlink>
+        <a:srgbClr val="0000FF"/>
+      </a:hlink>
+      <a:folHlink>
+        <a:srgbClr val="800080"/>
+      </a:folHlink>
+    </a:clrScheme>
+    <a:fontScheme name="Office">
+      <a:majorFont>
+        <a:latin typeface="Calibri"/>
+        <a:ea typeface=""/>
+        <a:cs typeface=""/>
+        <a:font script="Jpan" typeface="ＭＳ Ｐゴシック"/>
+        <a:font script="Hang" typeface="맑은 고딕"/>
+        <a:font script="Hans" typeface="宋体"/>
+        <a:font script="Hant" typeface="新細明體"/>
+        <a:font script="Arab" typeface="Times New Roman"/>
+        <a:font script="Hebr" typeface="Times New Roman"/>
+        <a:font script="Thai" typeface="Angsana New"/>
+        <a:font script="Ethi" typeface="Nyala"/>
+        <a:font script="Beng" typeface="Vrinda"/>
+        <a:font script="Gujr" typeface="Shruti"/>
+        <a:font script="Khmr" typeface="MoolBoran"/>
+        <a:font script="Knda" typeface="Tunga"/>
+        <a:font script="Guru" typeface="Raavi"/>
+        <a:font script="Cans" typeface="Euphemia"/>
+        <a:font script="Cher" typeface="Plantagenet Cherokee"/>
+        <a:font script="Yiii" typeface="Microsoft Yi Baiti"/>
+        <a:font script="Tibt" typeface="Microsoft Himalaya"/>
+        <a:font script="Thaa" typeface="MV Boli"/>
+        <a:font script="Deva" typeface="Mangal"/>
+        <a:font script="Telu" typeface="Gautami"/>
+        <a:font script="Taml" typeface="Latha"/>
+        <a:font script="Syrc" typeface="Estrangelo Edessa"/>
+        <a:font script="Orya" typeface="Kalinga"/>
+        <a:font script="Mlym" typeface="Kartika"/>
+        <a:font script="Laoo" typeface="DokChampa"/>
+        <a:font script="Sinh" typeface="Iskoola Pota"/>
+        <a:font script="Mong" typeface="Mongolian Baiti"/>
+        <a:font script="Viet" typeface="Times New Roman"/>
+        <a:font script="Uigh" typeface="Microsoft Uighur"/>
+        <a:font script="Geor" typeface="Sylfaen"/>
+      </a:majorFont>
+      <a:minorFont>
+        <a:latin typeface="Calibri"/>
+        <a:ea typeface=""/>
+        <a:cs typeface=""/>
+        <a:font script="Jpan" typeface="ＭＳ Ｐゴシック"/>
+        <a:font script="Hang" typeface="맑은 고딕"/>
+        <a:font script="Hans" typeface="宋体"/>
+        <a:font script="Hant" typeface="新細明體"/>
+        <a:font script="Arab" typeface="Arial"/>
+        <a:font script="Hebr" typeface="Arial"/>
+        <a:font script="Thai" typeface="Cordia New"/>
+        <a:font script="Ethi" typeface="Nyala"/>
+        <a:font script="Beng" typeface="Vrinda"/>
+        <a:font script="Gujr" typeface="Shruti"/>
+        <a:font script="Khmr" typeface="DaunPenh"/>
+        <a:font script="Knda" typeface="Tunga"/>
+        <a:font script="Guru" typeface="Raavi"/>
+        <a:font script="Cans" typeface="Euphemia"/>
+        <a:font script="Cher" typeface="Plantagenet Cherokee"/>
+        <a:font script="Yiii" typeface="Microsoft Yi Baiti"/>
+        <a:font script="Tibt" typeface="Microsoft Himalaya"/>
+        <a:font script="Thaa" typeface="MV Boli"/>
+        <a:font script="Deva" typeface="Mangal"/>
+        <a:font script="Telu" typeface="Gautami"/>
+        <a:font script="Taml" typeface="Latha"/>
+        <a:font script="Syrc" typeface="Estrangelo Edessa"/>
+        <a:font script="Orya" typeface="Kalinga"/>
+        <a:font script="Mlym" typeface="Kartika"/>
+        <a:font script="Laoo" typeface="DokChampa"/>
+        <a:font script="Sinh" typeface="Iskoola Pota"/>
+        <a:font script="Mong" typeface="Mongolian Baiti"/>
+        <a:font script="Viet" typeface="Arial"/>
+        <a:font script="Uigh" typeface="Microsoft Uighur"/>
+        <a:font script="Geor" typeface="Sylfaen"/>
+      </a:minorFont>
+    </a:fontScheme>
+    <a:fmtScheme name="Office">
+      <a:fillStyleLst>
+        <a:solidFill>
+          <a:schemeClr val="phClr"/>
+        </a:solidFill>
+        <a:gradFill rotWithShape="1">
+          <a:gsLst>
+            <a:gs pos="0">
+              <a:schemeClr val="phClr">
+                <a:tint val="50000"/>
+                <a:satMod val="300000"/>
+              </a:schemeClr>
+            </a:gs>
+            <a:gs pos="35000">
+              <a:schemeClr val="phClr">
+                <a:tint val="37000"/>
+                <a:satMod val="300000"/>
+              </a:schemeClr>
+            </a:gs>
+            <a:gs pos="100000">
+              <a:schemeClr val="phClr">
+                <a:tint val="15000"/>
+                <a:satMod val="350000"/>
+              </a:schemeClr>
+            </a:gs>
+          </a:gsLst>
+          <a:lin ang="16200000" scaled="1"/>
+        </a:gradFill>
+        <a:gradFill rotWithShape="1">
+          <a:gsLst>
+            <a:gs pos="0">
+              <a:schemeClr val="phClr">
+                <a:tint val="100000"/>
+                <a:shade val="100000"/>
+                <a:satMod val="130000"/>
+              </a:schemeClr>
+            </a:gs>
+            <a:gs pos="100000">
+              <a:schemeClr val="phClr">
+                <a:tint val="50000"/>
+                <a:shade val="100000"/>
+                <a:satMod val="350000"/>
+              </a:schemeClr>
+            </a:gs>
+          </a:gsLst>
+          <a:lin ang="16200000" scaled="0"/>
+        </a:gradFill>
+      </a:fillStyleLst>
+      <a:lnStyleLst>
+        <a:ln w="9525" cap="flat" cmpd="sng" algn="ctr">
+          <a:solidFill>
+            <a:schemeClr val="phClr">
+              <a:shade val="95000"/>
+              <a:satMod val="105000"/>
+            </a:schemeClr>
+          </a:solidFill>
+          <a:prstDash val="solid"/>
+        </a:ln>
+        <a:ln w="25400" cap="flat" cmpd="sng" algn="ctr">
+          <a:solidFill>
+            <a:schemeClr val="phClr"/>
+          </a:solidFill>
+          <a:prstDash val="solid"/>
+        </a:ln>
+        <a:ln w="38100" cap="flat" cmpd="sng" algn="ctr">
+          <a:solidFill>
+            <a:schemeClr val="phClr"/>
+          </a:solidFill>
+          <a:prstDash val="solid"/>
+        </a:ln>
+      </a:lnStyleLst>
+      <a:effectStyleLst>
+        <a:effectStyle>
+          <a:effectLst>
+            <a:outerShdw blurRad="40000" dist="20000" dir="5400000" rotWithShape="0">
+              <a:srgbClr val="000000">
+                <a:alpha val="38000"/>
+              </a:srgbClr>
+            </a:outerShdw>
+          </a:effectLst>
+        </a:effectStyle>
+        <a:effectStyle>
+          <a:effectLst>
+            <a:outerShdw blurRad="40000" dist="23000" dir="5400000" rotWithShape="0">
+              <a:srgbClr val="000000">
+                <a:alpha val="35000"/>
+              </a:srgbClr>
+            </a:outerShdw>
+          </a:effectLst>
+        </a:effectStyle>
+        <a:effectStyle>
+          <a:effectLst>
+            <a:outerShdw blurRad="40000" dist="23000" dir="5400000" rotWithShape="0">
+              <a:srgbClr val="000000">
+                <a:alpha val="35000"/>
+              </a:srgbClr>
+            </a:outerShdw>
+          </a:effectLst>
+          <a:scene3d>
+            <a:camera prst="orthographicFront">
+              <a:rot lat="0" lon="0" rev="0"/>
+            </a:camera>
+            <a:lightRig rig="threePt" dir="t">
+              <a:rot lat="0" lon="0" rev="1200000"/>
+            </a:lightRig>
+          </a:scene3d>
+          <a:sp3d>
+            <a:bevelT w="63500" h="25400"/>
+          </a:sp3d>
+        </a:effectStyle>
+      </a:effectStyleLst>
+      <a:bgFillStyleLst>
+        <a:solidFill>
+          <a:schemeClr val="phClr"/>
+        </a:solidFill>
+        <a:gradFill rotWithShape="1">
+          <a:gsLst>
+            <a:gs pos="0">
+              <a:schemeClr val="phClr">
+                <a:tint val="40000"/>
+                <a:satMod val="350000"/>
+              </a:schemeClr>
+            </a:gs>
+            <a:gs pos="40000">
+              <a:schemeClr val="phClr">
+                <a:tint val="45000"/>
+                <a:shade val="99000"/>
+                <a:satMod val="350000"/>
+              </a:schemeClr>
+            </a:gs>
+            <a:gs pos="100000">
+              <a:schemeClr val="phClr">
+                <a:shade val="20000"/>
+                <a:satMod val="255000"/>
+              </a:schemeClr>
+            </a:gs>
+          </a:gsLst>
+          <a:path path="circle">
+            <a:fillToRect l="50000" t="-80000" r="50000" b="180000"/>
+          </a:path>
+        </a:gradFill>
+        <a:gradFill rotWithShape="1">
+          <a:gsLst>
+            <a:gs pos="0">
+              <a:schemeClr val="phClr">
+                <a:tint val="80000"/>
+                <a:satMod val="300000"/>
+              </a:schemeClr>
+            </a:gs>
+            <a:gs pos="100000">
+              <a:schemeClr val="phClr">
+                <a:shade val="30000"/>
+                <a:satMod val="200000"/>
+              </a:schemeClr>
+            </a:gs>
+          </a:gsLst>
+          <a:path path="circle">
+            <a:fillToRect l="50000" t="50000" r="50000" b="50000"/>
+          </a:path>
+        </a:gradFill>
+      </a:bgFillStyleLst>
+    </a:fmtScheme>
+  </a:themeElements>
+  <a:objectDefaults>
+    <a:spDef>
+      <a:spPr/>
+      <a:bodyPr/>
+      <a:lstStyle/>
+      <a:style>
+        <a:lnRef idx="1">
+          <a:schemeClr val="accent1"/>
+        </a:lnRef>
+        <a:fillRef idx="3">
+          <a:schemeClr val="accent1"/>
+        </a:fillRef>
+        <a:effectRef idx="2">
+          <a:schemeClr val="accent1"/>
+        </a:effectRef>
+        <a:fontRef idx="minor">
+          <a:schemeClr val="lt1"/>
+        </a:fontRef>
+      </a:style>
+    </a:spDef>
+    <a:lnDef>
+      <a:spPr/>
+      <a:bodyPr/>
+      <a:lstStyle/>
+      <a:style>
+        <a:lnRef idx="2">
+          <a:schemeClr val="accent1"/>
+        </a:lnRef>
+        <a:fillRef idx="0">
+          <a:schemeClr val="accent1"/>
+        </a:fillRef>
+        <a:effectRef idx="1">
+          <a:schemeClr val="accent1"/>
+        </a:effectRef>
+        <a:fontRef idx="minor">
+          <a:schemeClr val="tx1"/>
+        </a:fontRef>
+      </a:style>
+    </a:lnDef>
+  </a:objectDefaults>
+  <a:extraClrSchemeLst/>
+</a:theme>
 </file>